--- a/docs/weeks/week02.pptx
+++ b/docs/weeks/week02.pptx
@@ -45,7 +45,6 @@
     <p:sldId id="293" r:id="rId39"/>
     <p:sldId id="294" r:id="rId40"/>
     <p:sldId id="295" r:id="rId41"/>
-    <p:sldId id="296" r:id="rId42"/>
   </p:sldIdLst>
   <p:sldSz cx="9144000" cy="5143500" type="screen16x9"/>
   <p:notesSz cx="6858000" cy="9144000"/>
@@ -3155,7 +3154,7 @@
             </a:pPr>
             <a:r>
               <a:rPr/>
-              <a:t>DATA 202 - Module 2</a:t>
+              <a:t>DATA 202 - Week 2</a:t>
             </a:r>
           </a:p>
         </p:txBody>
@@ -3236,40 +3235,32 @@
             <a:pPr lvl="0"/>
             <a:r>
               <a:rPr b="1"/>
-              <a:t>Using a higher order of thinking</a:t>
+              <a:t>Asking complex questions</a:t>
             </a:r>
             <a:r>
               <a:rPr/>
-              <a:t>. Duncan emphasizes that </a:t>
-            </a:r>
-            <a:r>
-              <a:rPr i="1"/>
-              <a:t>critical thinking is a higher order of thinking</a:t>
-            </a:r>
+              <a:t>. Duncan breaks down the process into a few sub-questions.</a:t>
+            </a:r>
+          </a:p>
+          <a:p>
+            <a:pPr lvl="1"/>
             <a:r>
               <a:rPr/>
-              <a:t> with different advanced thinking skills, and offers a few suggestions.</a:t>
+              <a:t>Who is the implied audience?</a:t>
             </a:r>
           </a:p>
           <a:p>
             <a:pPr lvl="1"/>
             <a:r>
               <a:rPr/>
-              <a:t>We base our thinking on logic and not on feelings.</a:t>
+              <a:t>What are the strengths and weaknesses of the argument?</a:t>
             </a:r>
           </a:p>
           <a:p>
             <a:pPr lvl="1"/>
             <a:r>
               <a:rPr/>
-              <a:t>We should look deeper into inferences for hidden assumptions or values.</a:t>
-            </a:r>
-          </a:p>
-          <a:p>
-            <a:pPr lvl="1"/>
-            <a:r>
-              <a:rPr/>
-              <a:t>Ask complex questions that help build a critical inquiry.</a:t>
+              <a:t>What are the underlying assumptions and values?</a:t>
             </a:r>
           </a:p>
         </p:txBody>
@@ -3314,32 +3305,43 @@
             <a:pPr lvl="0"/>
             <a:r>
               <a:rPr b="1"/>
-              <a:t>Asking complex questions</a:t>
+              <a:t>Using a variety of thinking processes</a:t>
             </a:r>
             <a:r>
               <a:rPr/>
-              <a:t>. Duncan breaks down the process into a few sub-questions.</a:t>
-            </a:r>
-          </a:p>
-          <a:p>
-            <a:pPr lvl="1"/>
+              <a:t>. Duncan defines a process around </a:t>
+            </a:r>
+            <a:r>
+              <a:rPr i="1"/>
+              <a:t>analyzing</a:t>
+            </a:r>
             <a:r>
               <a:rPr/>
-              <a:t>Who is the implied audience?</a:t>
-            </a:r>
-          </a:p>
-          <a:p>
-            <a:pPr lvl="1"/>
+              <a:t>, </a:t>
+            </a:r>
+            <a:r>
+              <a:rPr i="1"/>
+              <a:t>synthesizing</a:t>
+            </a:r>
             <a:r>
               <a:rPr/>
-              <a:t>What are the strengths and weaknesses of the argument?</a:t>
-            </a:r>
-          </a:p>
-          <a:p>
-            <a:pPr lvl="1"/>
+              <a:t>, </a:t>
+            </a:r>
+            <a:r>
+              <a:rPr i="1"/>
+              <a:t>interpreting</a:t>
+            </a:r>
             <a:r>
               <a:rPr/>
-              <a:t>What are the underlying assumptions and values?</a:t>
+              <a:t>, and </a:t>
+            </a:r>
+            <a:r>
+              <a:rPr i="1"/>
+              <a:t>evaluating</a:t>
+            </a:r>
+            <a:r>
+              <a:rPr/>
+              <a:t> information that helps with our thinking.</a:t>
             </a:r>
           </a:p>
         </p:txBody>
@@ -3384,43 +3386,11 @@
             <a:pPr lvl="0"/>
             <a:r>
               <a:rPr b="1"/>
-              <a:t>Using a variety of thinking processes</a:t>
+              <a:t>Reflecting on how we answer a question</a:t>
             </a:r>
             <a:r>
               <a:rPr/>
-              <a:t>. Duncan defines a process around </a:t>
-            </a:r>
-            <a:r>
-              <a:rPr i="1"/>
-              <a:t>analyzing</a:t>
-            </a:r>
-            <a:r>
-              <a:rPr/>
-              <a:t>, </a:t>
-            </a:r>
-            <a:r>
-              <a:rPr i="1"/>
-              <a:t>synthesizing</a:t>
-            </a:r>
-            <a:r>
-              <a:rPr/>
-              <a:t>, </a:t>
-            </a:r>
-            <a:r>
-              <a:rPr i="1"/>
-              <a:t>interpreting</a:t>
-            </a:r>
-            <a:r>
-              <a:rPr/>
-              <a:t>, and </a:t>
-            </a:r>
-            <a:r>
-              <a:rPr i="1"/>
-              <a:t>evaluating</a:t>
-            </a:r>
-            <a:r>
-              <a:rPr/>
-              <a:t> information that helps with our thinking.</a:t>
+              <a:t>. Duncan ends with a set of questions that help us think about different points of view, if we have clarity, and if more details are needed.</a:t>
             </a:r>
           </a:p>
         </p:txBody>
@@ -3449,27 +3419,30 @@
       </p:grpSpPr>
       <p:sp>
         <p:nvSpPr>
-          <p:cNvPr id="3" name="Content Placeholder 2"/>
-          <p:cNvSpPr>
-            <a:spLocks noGrp="1"/>
-          </p:cNvSpPr>
-          <p:nvPr>
-            <p:ph idx="1"/>
-          </p:nvPr>
-        </p:nvSpPr>
-        <p:spPr/>
+          <p:cNvPr id="2" name="Title 1"/>
+          <p:cNvSpPr>
+            <a:spLocks noGrp="1"/>
+          </p:cNvSpPr>
+          <p:nvPr>
+            <p:ph type="title"/>
+          </p:nvPr>
+        </p:nvSpPr>
+        <p:spPr>
+          <a:xfrm>
+            <a:off x="722313" y="3305176"/>
+            <a:ext cx="7772400" cy="1021556"/>
+          </a:xfrm>
+        </p:spPr>
         <p:txBody>
           <a:bodyPr/>
           <a:lstStyle/>
           <a:p>
-            <a:pPr lvl="0"/>
-            <a:r>
-              <a:rPr b="1"/>
-              <a:t>Reflecting on how we answer a question</a:t>
-            </a:r>
+            <a:pPr lvl="0" indent="0" marL="0">
+              <a:buNone/>
+            </a:pPr>
             <a:r>
               <a:rPr/>
-              <a:t>. Duncan ends with a set of questions that help us think about different points of view, if we have clarity, and if more details are needed.</a:t>
+              <a:t>Part II: Content</a:t>
             </a:r>
           </a:p>
         </p:txBody>
@@ -3498,20 +3471,15 @@
       </p:grpSpPr>
       <p:sp>
         <p:nvSpPr>
-          <p:cNvPr id="2" name="Title 1"/>
-          <p:cNvSpPr>
-            <a:spLocks noGrp="1"/>
-          </p:cNvSpPr>
-          <p:nvPr>
-            <p:ph type="title"/>
-          </p:nvPr>
-        </p:nvSpPr>
-        <p:spPr>
-          <a:xfrm>
-            <a:off x="722313" y="3305176"/>
-            <a:ext cx="7772400" cy="1021556"/>
-          </a:xfrm>
-        </p:spPr>
+          <p:cNvPr id="3" name="Content Placeholder 2"/>
+          <p:cNvSpPr>
+            <a:spLocks noGrp="1"/>
+          </p:cNvSpPr>
+          <p:nvPr>
+            <p:ph idx="1"/>
+          </p:nvPr>
+        </p:nvSpPr>
+        <p:spPr/>
         <p:txBody>
           <a:bodyPr/>
           <a:lstStyle/>
@@ -3521,7 +3489,7 @@
             </a:pPr>
             <a:r>
               <a:rPr/>
-              <a:t>Part II: Content</a:t>
+              <a:t>The quantification of information can help us understand and represent important situations. We’ll begin by exploring the concept of a set, and how it is defined in mathematics and used to frame various situations.</a:t>
             </a:r>
           </a:p>
         </p:txBody>
@@ -3548,61 +3516,118 @@
           <a:chExt cx="0" cy="0"/>
         </a:xfrm>
       </p:grpSpPr>
-      <p:sp>
-        <p:nvSpPr>
-          <p:cNvPr id="4" name="Text Placeholder 3"/>
-          <p:cNvSpPr>
-            <a:spLocks noGrp="1"/>
-          </p:cNvSpPr>
-          <p:nvPr>
-            <p:ph idx="2" sz="half" type="body"/>
-          </p:nvPr>
-        </p:nvSpPr>
-        <p:spPr/>
-        <p:txBody>
-          <a:bodyPr/>
-          <a:lstStyle/>
-          <a:p>
-            <a:pPr lvl="0" indent="0" marL="0">
-              <a:buNone/>
-            </a:pPr>
-            <a:r>
-              <a:rPr/>
-              <a:t>The quantification of information can help us understand and represent important situations.</a:t>
-            </a:r>
-          </a:p>
-        </p:txBody>
-      </p:sp>
-      <p:pic>
-        <p:nvPicPr>
-          <p:cNvPr descr="img/wk2-quant.png" id="0" name="Picture 1"/>
-          <p:cNvPicPr>
-            <a:picLocks noGrp="1" noChangeAspect="1"/>
-          </p:cNvPicPr>
-          <p:nvPr/>
-        </p:nvPicPr>
-        <p:blipFill>
-          <a:blip r:embed="rId2"/>
-          <a:stretch>
-            <a:fillRect/>
-          </a:stretch>
-        </p:blipFill>
-        <p:spPr bwMode="auto">
-          <a:xfrm>
-            <a:off x="3568700" y="673100"/>
-            <a:ext cx="5105400" cy="3441700"/>
-          </a:xfrm>
-          <a:prstGeom prst="rect">
-            <a:avLst/>
-          </a:prstGeom>
-          <a:noFill/>
-          <a:ln w="9525">
-            <a:noFill/>
-            <a:headEnd/>
-            <a:tailEnd/>
-          </a:ln>
-        </p:spPr>
-      </p:pic>
+      <mc:AlternateContent xmlns:mc="http://schemas.openxmlformats.org/markup-compatibility/2006">
+        <mc:Choice xmlns:a14="http://schemas.microsoft.com/office/drawing/2010/main" Requires="a14">
+          <p:sp>
+            <p:nvSpPr>
+              <p:cNvPr id="3" name="Content Placeholder 2"/>
+              <p:cNvSpPr>
+                <a:spLocks noGrp="1"/>
+              </p:cNvSpPr>
+              <p:nvPr>
+                <p:ph idx="1"/>
+              </p:nvPr>
+            </p:nvSpPr>
+            <p:spPr/>
+            <p:txBody>
+              <a:bodyPr/>
+              <a:lstStyle/>
+              <a:p>
+                <a:pPr lvl="0" indent="0" marL="1270000">
+                  <a:buNone/>
+                </a:pPr>
+                <a:r>
+                  <a:rPr sz="2000" b="1"/>
+                  <a:t>DEFINITION: Set</a:t>
+                </a:r>
+              </a:p>
+              <a:p>
+                <a:pPr lvl="0" indent="0" marL="1270000">
+                  <a:buNone/>
+                </a:pPr>
+                <a:r>
+                  <a:rPr sz="2000"/>
+                  <a:t>A </a:t>
+                </a:r>
+                <a:r>
+                  <a:rPr sz="2000" b="1"/>
+                  <a:t>set</a:t>
+                </a:r>
+                <a:r>
+                  <a:rPr sz="2000"/>
+                  <a:t> is a well-defined collection of elements or items.</a:t>
+                </a:r>
+              </a:p>
+              <a:p>
+                <a:pPr lvl="0" indent="0" marL="0">
+                  <a:buNone/>
+                </a:pPr>
+                <a:r>
+                  <a:rPr/>
+                  <a:t>A set is characterized by its contents, or what is generally referred to as a set’s </a:t>
+                </a:r>
+                <a:r>
+                  <a:rPr i="1"/>
+                  <a:t>elements</a:t>
+                </a:r>
+                <a:r>
+                  <a:rPr/>
+                  <a:t>. If we are given two sets, the sets are considered equal if and only if they have exactly the same elements. The basic relation for sets is that of membership in a particular set.</a:t>
+                </a:r>
+              </a:p>
+              <a:p>
+                <a:pPr lvl="0"/>
+                <a:r>
+                  <a:rPr/>
+                  <a:t>We write </a:t>
+                </a:r>
+                <a14:m>
+                  <m:oMath xmlns:m="http://schemas.openxmlformats.org/officeDocument/2006/math">
+                    <m:r>
+                      <m:t>x</m:t>
+                    </m:r>
+                    <m:r>
+                      <m:rPr>
+                        <m:sty m:val="p"/>
+                      </m:rPr>
+                      <m:t>∈</m:t>
+                    </m:r>
+                    <m:r>
+                      <m:t>X</m:t>
+                    </m:r>
+                  </m:oMath>
+                </a14:m>
+                <a:r>
+                  <a:rPr/>
+                  <a:t> to indicate that the object </a:t>
+                </a:r>
+                <a14:m>
+                  <m:oMath xmlns:m="http://schemas.openxmlformats.org/officeDocument/2006/math">
+                    <m:r>
+                      <m:t>x</m:t>
+                    </m:r>
+                  </m:oMath>
+                </a14:m>
+                <a:r>
+                  <a:rPr/>
+                  <a:t> is an element (or member) of the set </a:t>
+                </a:r>
+                <a14:m>
+                  <m:oMath xmlns:m="http://schemas.openxmlformats.org/officeDocument/2006/math">
+                    <m:r>
+                      <m:t>X</m:t>
+                    </m:r>
+                  </m:oMath>
+                </a14:m>
+                <a:r>
+                  <a:rPr/>
+                  <a:t>.</a:t>
+                </a:r>
+              </a:p>
+            </p:txBody>
+          </p:sp>
+        </mc:Choice>
+      </mc:AlternateContent>
     </p:spTree>
   </p:cSld>
 </p:sld>
@@ -3646,34 +3671,12 @@
                   <a:buNone/>
                 </a:pPr>
                 <a:r>
+                  <a:rPr b="1"/>
+                  <a:t>A FEW IMPORTANT NOTES</a:t>
+                </a:r>
+                <a:r>
                   <a:rPr/>
-                  <a:t>We’ll begin by exploring the concept of a set, and how it is defined in mathematics and used to frame various situations.</a:t>
-                </a:r>
-              </a:p>
-              <a:p>
-                <a:pPr lvl="0" indent="0" marL="1270000">
-                  <a:buNone/>
-                </a:pPr>
-                <a:r>
-                  <a:rPr sz="2000" b="1"/>
-                  <a:t>DEFINITION: Set</a:t>
-                </a:r>
-              </a:p>
-              <a:p>
-                <a:pPr lvl="0" indent="0" marL="1270000">
-                  <a:buNone/>
-                </a:pPr>
-                <a:r>
-                  <a:rPr sz="2000"/>
-                  <a:t>A </a:t>
-                </a:r>
-                <a:r>
-                  <a:rPr sz="2000" b="1"/>
-                  <a:t>set</a:t>
-                </a:r>
-                <a:r>
-                  <a:rPr sz="2000"/>
-                  <a:t> is a well-defined collection of elements or items.</a:t>
+                  <a:t>:</a:t>
                 </a:r>
               </a:p>
               <a:p>
@@ -3681,59 +3684,497 @@
                   <a:buNone/>
                 </a:pPr>
                 <a:r>
+                  <a:rPr b="1"/>
+                  <a:t>Note 1</a:t>
+                </a:r>
+                <a:r>
                   <a:rPr/>
-                  <a:t>A set is characterized by its contents, or what is generally referred to as a set’s </a:t>
+                  <a:t>: We tend to </a:t>
                 </a:r>
                 <a:r>
                   <a:rPr i="1"/>
-                  <a:t>elements</a:t>
+                  <a:t>label sets using capital letters</a:t>
                 </a:r>
                 <a:r>
                   <a:rPr/>
-                  <a:t>. If we are given two sets, the sets are considered equal if and only if they have exactly the same elements. The basic relation for sets is that of membership in a particular set.</a:t>
+                  <a:t>.</a:t>
                 </a:r>
               </a:p>
               <a:p>
                 <a:pPr lvl="0"/>
                 <a:r>
                   <a:rPr/>
-                  <a:t>We write </a:t>
+                  <a:t>For example, we may label two different sets as </a:t>
                 </a:r>
                 <a14:m>
                   <m:oMath xmlns:m="http://schemas.openxmlformats.org/officeDocument/2006/math">
                     <m:r>
-                      <m:t>x</m:t>
-                    </m:r>
-                    <m:r>
-                      <m:rPr>
-                        <m:sty m:val="p"/>
-                      </m:rPr>
-                      <m:t>∈</m:t>
-                    </m:r>
-                    <m:r>
                       <m:t>X</m:t>
                     </m:r>
                   </m:oMath>
                 </a14:m>
                 <a:r>
                   <a:rPr/>
-                  <a:t> to indicate that the object </a:t>
+                  <a:t> and </a:t>
                 </a:r>
                 <a14:m>
                   <m:oMath xmlns:m="http://schemas.openxmlformats.org/officeDocument/2006/math">
                     <m:r>
-                      <m:t>x</m:t>
+                      <m:t>Y</m:t>
                     </m:r>
                   </m:oMath>
                 </a14:m>
                 <a:r>
                   <a:rPr/>
-                  <a:t> is an element (or member) of the set </a:t>
+                  <a:t> or as </a:t>
                 </a:r>
                 <a14:m>
                   <m:oMath xmlns:m="http://schemas.openxmlformats.org/officeDocument/2006/math">
                     <m:r>
+                      <m:t>A</m:t>
+                    </m:r>
+                  </m:oMath>
+                </a14:m>
+                <a:r>
+                  <a:rPr/>
+                  <a:t> and </a:t>
+                </a:r>
+                <a14:m>
+                  <m:oMath xmlns:m="http://schemas.openxmlformats.org/officeDocument/2006/math">
+                    <m:r>
+                      <m:t>B</m:t>
+                    </m:r>
+                  </m:oMath>
+                </a14:m>
+                <a:r>
+                  <a:rPr/>
+                  <a:t>.</a:t>
+                </a:r>
+              </a:p>
+              <a:p>
+                <a:pPr lvl="0" indent="0" marL="0">
+                  <a:buNone/>
+                </a:pPr>
+                <a:r>
+                  <a:rPr b="1"/>
+                  <a:t>Note 2</a:t>
+                </a:r>
+                <a:r>
+                  <a:rPr/>
+                  <a:t>: We </a:t>
+                </a:r>
+                <a:r>
+                  <a:rPr i="1"/>
+                  <a:t>use curly brackets</a:t>
+                </a:r>
+                <a:r>
+                  <a:rPr/>
+                  <a:t> { and } </a:t>
+                </a:r>
+                <a:r>
+                  <a:rPr i="1"/>
+                  <a:t>to enclose the elements of a set</a:t>
+                </a:r>
+                <a:r>
+                  <a:rPr/>
+                  <a:t>.</a:t>
+                </a:r>
+              </a:p>
+              <a:p>
+                <a:pPr lvl="0"/>
+                <a:r>
+                  <a:rPr/>
+                  <a:t>Parentheses ( and ) are often used to indicate a point like </a:t>
+                </a:r>
+                <a14:m>
+                  <m:oMath xmlns:m="http://schemas.openxmlformats.org/officeDocument/2006/math">
+                    <m:d>
+                      <m:dPr>
+                        <m:begChr m:val="("/>
+                        <m:endChr m:val=")"/>
+                        <m:sepChr m:val=""/>
+                        <m:grow/>
+                      </m:dPr>
+                      <m:e>
+                        <m:r>
+                          <m:t>x</m:t>
+                        </m:r>
+                        <m:r>
+                          <m:rPr>
+                            <m:sty m:val="p"/>
+                          </m:rPr>
+                          <m:t>,</m:t>
+                        </m:r>
+                        <m:r>
+                          <m:t>f</m:t>
+                        </m:r>
+                        <m:d>
+                          <m:dPr>
+                            <m:begChr m:val="("/>
+                            <m:endChr m:val=")"/>
+                            <m:sepChr m:val=""/>
+                            <m:grow/>
+                          </m:dPr>
+                          <m:e>
+                            <m:r>
+                              <m:t>x</m:t>
+                            </m:r>
+                          </m:e>
+                        </m:d>
+                      </m:e>
+                    </m:d>
+                  </m:oMath>
+                </a14:m>
+                <a:r>
+                  <a:rPr/>
+                  <a:t> or an open interval</a:t>
+                </a:r>
+              </a:p>
+              <a:p>
+                <a:pPr lvl="0"/>
+                <a:r>
+                  <a:rPr/>
+                  <a:t>Square brackets [ and ] are often used to separate sets or to indicate a closed interval.</a:t>
+                </a:r>
+              </a:p>
+              <a:p>
+                <a:pPr lvl="0" indent="0" marL="0">
+                  <a:buNone/>
+                </a:pPr>
+                <a:r>
+                  <a:rPr b="1"/>
+                  <a:t>Note 3</a:t>
+                </a:r>
+                <a:r>
+                  <a:rPr/>
+                  <a:t>: We tend to </a:t>
+                </a:r>
+                <a:r>
+                  <a:rPr i="1"/>
+                  <a:t>list the elements of a set using lower case letters</a:t>
+                </a:r>
+                <a:r>
+                  <a:rPr/>
+                  <a:t> with subscripts, </a:t>
+                </a:r>
+                <a14:m>
+                  <m:oMath xmlns:m="http://schemas.openxmlformats.org/officeDocument/2006/math">
+                    <m:sSub>
+                      <m:e>
+                        <m:r>
+                          <m:t>x</m:t>
+                        </m:r>
+                      </m:e>
+                      <m:sub>
+                        <m:r>
+                          <m:t>i</m:t>
+                        </m:r>
+                      </m:sub>
+                    </m:sSub>
+                  </m:oMath>
+                </a14:m>
+                <a:r>
+                  <a:rPr/>
+                  <a:t>.</a:t>
+                </a:r>
+              </a:p>
+              <a:p>
+                <a:pPr lvl="0"/>
+                <a:r>
+                  <a:rPr/>
+                  <a:t>The </a:t>
+                </a:r>
+                <a14:m>
+                  <m:oMath xmlns:m="http://schemas.openxmlformats.org/officeDocument/2006/math">
+                    <m:r>
+                      <m:t>i</m:t>
+                    </m:r>
+                  </m:oMath>
+                </a14:m>
+                <a:r>
+                  <a:rPr/>
+                  <a:t> in </a:t>
+                </a:r>
+                <a14:m>
+                  <m:oMath xmlns:m="http://schemas.openxmlformats.org/officeDocument/2006/math">
+                    <m:sSub>
+                      <m:e>
+                        <m:r>
+                          <m:t>x</m:t>
+                        </m:r>
+                      </m:e>
+                      <m:sub>
+                        <m:r>
+                          <m:t>i</m:t>
+                        </m:r>
+                      </m:sub>
+                    </m:sSub>
+                  </m:oMath>
+                </a14:m>
+                <a:r>
+                  <a:rPr/>
+                  <a:t> is a subscript that is used as a “position indicator,” with </a:t>
+                </a:r>
+                <a14:m>
+                  <m:oMath xmlns:m="http://schemas.openxmlformats.org/officeDocument/2006/math">
+                    <m:r>
+                      <m:t>i</m:t>
+                    </m:r>
+                    <m:r>
+                      <m:rPr>
+                        <m:sty m:val="p"/>
+                      </m:rPr>
+                      <m:t>=</m:t>
+                    </m:r>
+                    <m:r>
+                      <m:t>1</m:t>
+                    </m:r>
+                    <m:r>
+                      <m:rPr>
+                        <m:sty m:val="p"/>
+                      </m:rPr>
+                      <m:t>,</m:t>
+                    </m:r>
+                    <m:r>
+                      <m:t>2</m:t>
+                    </m:r>
+                    <m:r>
+                      <m:rPr>
+                        <m:sty m:val="p"/>
+                      </m:rPr>
+                      <m:t>,</m:t>
+                    </m:r>
+                    <m:r>
+                      <m:t>3</m:t>
+                    </m:r>
+                    <m:r>
+                      <m:rPr>
+                        <m:sty m:val="p"/>
+                      </m:rPr>
+                      <m:t>,</m:t>
+                    </m:r>
+                    <m:r>
+                      <m:rPr>
+                        <m:sty m:val="p"/>
+                      </m:rPr>
+                      <m:t>.</m:t>
+                    </m:r>
+                    <m:r>
+                      <m:rPr>
+                        <m:sty m:val="p"/>
+                      </m:rPr>
+                      <m:t>.</m:t>
+                    </m:r>
+                    <m:r>
+                      <m:rPr>
+                        <m:sty m:val="p"/>
+                      </m:rPr>
+                      <m:t>.</m:t>
+                    </m:r>
+                  </m:oMath>
+                </a14:m>
+              </a:p>
+              <a:p>
+                <a:pPr lvl="0"/>
+                <a:r>
+                  <a:rPr/>
+                  <a:t>We use subscripts to index the elements of a set: </a:t>
+                </a:r>
+                <a14:m>
+                  <m:oMath xmlns:m="http://schemas.openxmlformats.org/officeDocument/2006/math">
+                    <m:r>
                       <m:t>X</m:t>
+                    </m:r>
+                    <m:r>
+                      <m:rPr>
+                        <m:sty m:val="p"/>
+                      </m:rPr>
+                      <m:t>=</m:t>
+                    </m:r>
+                    <m:r>
+                      <m:rPr>
+                        <m:sty m:val="p"/>
+                      </m:rPr>
+                      <m:t>{</m:t>
+                    </m:r>
+                    <m:sSub>
+                      <m:e>
+                        <m:r>
+                          <m:t>x</m:t>
+                        </m:r>
+                      </m:e>
+                      <m:sub>
+                        <m:r>
+                          <m:t>1</m:t>
+                        </m:r>
+                      </m:sub>
+                    </m:sSub>
+                    <m:r>
+                      <m:rPr>
+                        <m:sty m:val="p"/>
+                      </m:rPr>
+                      <m:t>,</m:t>
+                    </m:r>
+                    <m:sSub>
+                      <m:e>
+                        <m:r>
+                          <m:t>x</m:t>
+                        </m:r>
+                      </m:e>
+                      <m:sub>
+                        <m:r>
+                          <m:t>2</m:t>
+                        </m:r>
+                      </m:sub>
+                    </m:sSub>
+                    <m:r>
+                      <m:rPr>
+                        <m:sty m:val="p"/>
+                      </m:rPr>
+                      <m:t>,</m:t>
+                    </m:r>
+                    <m:r>
+                      <m:rPr>
+                        <m:sty m:val="p"/>
+                      </m:rPr>
+                      <m:t>.</m:t>
+                    </m:r>
+                    <m:r>
+                      <m:rPr>
+                        <m:sty m:val="p"/>
+                      </m:rPr>
+                      <m:t>.</m:t>
+                    </m:r>
+                    <m:r>
+                      <m:rPr>
+                        <m:sty m:val="p"/>
+                      </m:rPr>
+                      <m:t>.</m:t>
+                    </m:r>
+                    <m:r>
+                      <m:rPr>
+                        <m:sty m:val="p"/>
+                      </m:rPr>
+                      <m:t>,</m:t>
+                    </m:r>
+                    <m:sSub>
+                      <m:e>
+                        <m:r>
+                          <m:t>x</m:t>
+                        </m:r>
+                      </m:e>
+                      <m:sub>
+                        <m:r>
+                          <m:t>n</m:t>
+                        </m:r>
+                      </m:sub>
+                    </m:sSub>
+                    <m:r>
+                      <m:rPr>
+                        <m:sty m:val="p"/>
+                      </m:rPr>
+                      <m:t>}</m:t>
+                    </m:r>
+                  </m:oMath>
+                </a14:m>
+                <a:r>
+                  <a:rPr/>
+                  <a:t> and </a:t>
+                </a:r>
+                <a14:m>
+                  <m:oMath xmlns:m="http://schemas.openxmlformats.org/officeDocument/2006/math">
+                    <m:r>
+                      <m:t>A</m:t>
+                    </m:r>
+                    <m:r>
+                      <m:rPr>
+                        <m:sty m:val="p"/>
+                      </m:rPr>
+                      <m:t>=</m:t>
+                    </m:r>
+                    <m:r>
+                      <m:rPr>
+                        <m:sty m:val="p"/>
+                      </m:rPr>
+                      <m:t>{</m:t>
+                    </m:r>
+                    <m:sSub>
+                      <m:e>
+                        <m:r>
+                          <m:t>a</m:t>
+                        </m:r>
+                      </m:e>
+                      <m:sub>
+                        <m:r>
+                          <m:t>1</m:t>
+                        </m:r>
+                      </m:sub>
+                    </m:sSub>
+                    <m:r>
+                      <m:rPr>
+                        <m:sty m:val="p"/>
+                      </m:rPr>
+                      <m:t>,</m:t>
+                    </m:r>
+                    <m:sSub>
+                      <m:e>
+                        <m:r>
+                          <m:t>a</m:t>
+                        </m:r>
+                      </m:e>
+                      <m:sub>
+                        <m:r>
+                          <m:t>2</m:t>
+                        </m:r>
+                      </m:sub>
+                    </m:sSub>
+                    <m:r>
+                      <m:rPr>
+                        <m:sty m:val="p"/>
+                      </m:rPr>
+                      <m:t>,</m:t>
+                    </m:r>
+                    <m:r>
+                      <m:rPr>
+                        <m:sty m:val="p"/>
+                      </m:rPr>
+                      <m:t>.</m:t>
+                    </m:r>
+                    <m:r>
+                      <m:rPr>
+                        <m:sty m:val="p"/>
+                      </m:rPr>
+                      <m:t>.</m:t>
+                    </m:r>
+                    <m:r>
+                      <m:rPr>
+                        <m:sty m:val="p"/>
+                      </m:rPr>
+                      <m:t>.</m:t>
+                    </m:r>
+                    <m:r>
+                      <m:rPr>
+                        <m:sty m:val="p"/>
+                      </m:rPr>
+                      <m:t>,</m:t>
+                    </m:r>
+                    <m:sSub>
+                      <m:e>
+                        <m:r>
+                          <m:t>a</m:t>
+                        </m:r>
+                      </m:e>
+                      <m:sub>
+                        <m:r>
+                          <m:t>n</m:t>
+                        </m:r>
+                      </m:sub>
+                    </m:sSub>
+                    <m:r>
+                      <m:rPr>
+                        <m:sty m:val="p"/>
+                      </m:rPr>
+                      <m:t>}</m:t>
                     </m:r>
                   </m:oMath>
                 </a14:m>
@@ -3785,340 +4226,54 @@
               <a:bodyPr/>
               <a:lstStyle/>
               <a:p>
-                <a:pPr lvl="0" indent="0" marL="0">
+                <a:pPr lvl="0" indent="0" marL="1270000">
                   <a:buNone/>
                 </a:pPr>
                 <a:r>
-                  <a:rPr b="1"/>
-                  <a:t>A FEW IMPORTANT NOTES</a:t>
-                </a:r>
-                <a:r>
-                  <a:rPr/>
-                  <a:t>:</a:t>
+                  <a:rPr sz="2000" b="1"/>
+                  <a:t>EXAMPLES – Sets as a collection of elements or items</a:t>
                 </a:r>
               </a:p>
               <a:p>
-                <a:pPr lvl="0" indent="0" marL="0">
+                <a:pPr lvl="0" indent="0" marL="1270000">
                   <a:buNone/>
                 </a:pPr>
                 <a:r>
-                  <a:rPr b="1"/>
-                  <a:t>Note 1</a:t>
-                </a:r>
-                <a:r>
-                  <a:rPr/>
-                  <a:t>: We tend to </a:t>
-                </a:r>
-                <a:r>
-                  <a:rPr i="1"/>
-                  <a:t>label sets using capital letters</a:t>
-                </a:r>
-                <a:r>
-                  <a:rPr/>
-                  <a:t>.</a:t>
+                  <a:rPr sz="2000"/>
+                  <a:t>Sets can be defined in many different ways.</a:t>
                 </a:r>
               </a:p>
               <a:p>
-                <a:pPr lvl="0"/>
-                <a:r>
-                  <a:rPr/>
-                  <a:t>For example, we may label two different sets as </a:t>
+                <a:pPr lvl="0" indent="-342900" marL="342900">
+                  <a:buAutoNum type="romanLcPeriod"/>
+                </a:pPr>
+                <a:r>
+                  <a:rPr sz="2000"/>
+                  <a:t>Consider a set of electronics </a:t>
                 </a:r>
                 <a14:m>
                   <m:oMath xmlns:m="http://schemas.openxmlformats.org/officeDocument/2006/math">
                     <m:r>
-                      <m:t>X</m:t>
+                      <m:t>E</m:t>
                     </m:r>
                   </m:oMath>
                 </a14:m>
                 <a:r>
-                  <a:rPr/>
-                  <a:t> and </a:t>
+                  <a:rPr sz="2000"/>
+                  <a:t> = {laptop, phone, tablet, watch} = </a:t>
                 </a:r>
                 <a14:m>
                   <m:oMath xmlns:m="http://schemas.openxmlformats.org/officeDocument/2006/math">
                     <m:r>
-                      <m:t>Y</m:t>
-                    </m:r>
-                  </m:oMath>
-                </a14:m>
-                <a:r>
-                  <a:rPr/>
-                  <a:t> or as </a:t>
-                </a:r>
-                <a14:m>
-                  <m:oMath xmlns:m="http://schemas.openxmlformats.org/officeDocument/2006/math">
-                    <m:r>
-                      <m:t>A</m:t>
-                    </m:r>
-                  </m:oMath>
-                </a14:m>
-                <a:r>
-                  <a:rPr/>
-                  <a:t> and </a:t>
-                </a:r>
-                <a14:m>
-                  <m:oMath xmlns:m="http://schemas.openxmlformats.org/officeDocument/2006/math">
-                    <m:r>
-                      <m:t>B</m:t>
-                    </m:r>
-                  </m:oMath>
-                </a14:m>
-                <a:r>
-                  <a:rPr/>
-                  <a:t>.</a:t>
-                </a:r>
-              </a:p>
-              <a:p>
-                <a:pPr lvl="0" indent="0" marL="0">
-                  <a:buNone/>
-                </a:pPr>
-                <a:r>
-                  <a:rPr b="1"/>
-                  <a:t>Note 2</a:t>
-                </a:r>
-                <a:r>
-                  <a:rPr/>
-                  <a:t>: We </a:t>
-                </a:r>
-                <a:r>
-                  <a:rPr i="1"/>
-                  <a:t>use curly brackets</a:t>
-                </a:r>
-                <a:r>
-                  <a:rPr/>
-                  <a:t> { and } </a:t>
-                </a:r>
-                <a:r>
-                  <a:rPr i="1"/>
-                  <a:t>to enclose the elements of a set</a:t>
-                </a:r>
-                <a:r>
-                  <a:rPr/>
-                  <a:t>.</a:t>
-                </a:r>
-              </a:p>
-              <a:p>
-                <a:pPr lvl="0"/>
-                <a:r>
-                  <a:rPr/>
-                  <a:t>Parentheses ( and ) are often used to indicate a point like </a:t>
-                </a:r>
-                <a14:m>
-                  <m:oMath xmlns:m="http://schemas.openxmlformats.org/officeDocument/2006/math">
-                    <m:d>
-                      <m:dPr>
-                        <m:begChr m:val="("/>
-                        <m:endChr m:val=")"/>
-                        <m:sepChr m:val=""/>
-                        <m:grow/>
-                      </m:dPr>
-                      <m:e>
-                        <m:r>
-                          <m:t>x</m:t>
-                        </m:r>
-                        <m:r>
-                          <m:rPr>
-                            <m:sty m:val="p"/>
-                          </m:rPr>
-                          <m:t>,</m:t>
-                        </m:r>
-                        <m:r>
-                          <m:t>f</m:t>
-                        </m:r>
-                        <m:d>
-                          <m:dPr>
-                            <m:begChr m:val="("/>
-                            <m:endChr m:val=")"/>
-                            <m:sepChr m:val=""/>
-                            <m:grow/>
-                          </m:dPr>
-                          <m:e>
-                            <m:r>
-                              <m:t>x</m:t>
-                            </m:r>
-                          </m:e>
-                        </m:d>
-                      </m:e>
-                    </m:d>
-                  </m:oMath>
-                </a14:m>
-                <a:r>
-                  <a:rPr/>
-                  <a:t> or an open interval</a:t>
-                </a:r>
-              </a:p>
-              <a:p>
-                <a:pPr lvl="0"/>
-                <a:r>
-                  <a:rPr/>
-                  <a:t>Square brackets [ and ] are often used to separate sets or to indicate a closed interval.</a:t>
-                </a:r>
-              </a:p>
-              <a:p>
-                <a:pPr lvl="0" indent="0" marL="0">
-                  <a:buNone/>
-                </a:pPr>
-                <a:r>
-                  <a:rPr b="1"/>
-                  <a:t>Note 3</a:t>
-                </a:r>
-                <a:r>
-                  <a:rPr/>
-                  <a:t>: We tend to </a:t>
-                </a:r>
-                <a:r>
-                  <a:rPr i="1"/>
-                  <a:t>list the elements of a set using lower case letters</a:t>
-                </a:r>
-                <a:r>
-                  <a:rPr/>
-                  <a:t> with subscripts, </a:t>
-                </a:r>
-                <a14:m>
-                  <m:oMath xmlns:m="http://schemas.openxmlformats.org/officeDocument/2006/math">
+                      <m:rPr>
+                        <m:sty m:val="p"/>
+                      </m:rPr>
+                      <m:t>{</m:t>
+                    </m:r>
                     <m:sSub>
                       <m:e>
                         <m:r>
-                          <m:t>x</m:t>
-                        </m:r>
-                      </m:e>
-                      <m:sub>
-                        <m:r>
-                          <m:t>i</m:t>
-                        </m:r>
-                      </m:sub>
-                    </m:sSub>
-                  </m:oMath>
-                </a14:m>
-                <a:r>
-                  <a:rPr/>
-                  <a:t>.</a:t>
-                </a:r>
-              </a:p>
-              <a:p>
-                <a:pPr lvl="0"/>
-                <a:r>
-                  <a:rPr/>
-                  <a:t>The </a:t>
-                </a:r>
-                <a14:m>
-                  <m:oMath xmlns:m="http://schemas.openxmlformats.org/officeDocument/2006/math">
-                    <m:r>
-                      <m:t>i</m:t>
-                    </m:r>
-                  </m:oMath>
-                </a14:m>
-                <a:r>
-                  <a:rPr/>
-                  <a:t> in </a:t>
-                </a:r>
-                <a14:m>
-                  <m:oMath xmlns:m="http://schemas.openxmlformats.org/officeDocument/2006/math">
-                    <m:sSub>
-                      <m:e>
-                        <m:r>
-                          <m:t>x</m:t>
-                        </m:r>
-                      </m:e>
-                      <m:sub>
-                        <m:r>
-                          <m:t>i</m:t>
-                        </m:r>
-                      </m:sub>
-                    </m:sSub>
-                  </m:oMath>
-                </a14:m>
-                <a:r>
-                  <a:rPr/>
-                  <a:t> is a subscript that is used as a “position indicator,” with </a:t>
-                </a:r>
-                <a14:m>
-                  <m:oMath xmlns:m="http://schemas.openxmlformats.org/officeDocument/2006/math">
-                    <m:r>
-                      <m:t>i</m:t>
-                    </m:r>
-                    <m:r>
-                      <m:rPr>
-                        <m:sty m:val="p"/>
-                      </m:rPr>
-                      <m:t>=</m:t>
-                    </m:r>
-                    <m:r>
-                      <m:t>1</m:t>
-                    </m:r>
-                    <m:r>
-                      <m:rPr>
-                        <m:sty m:val="p"/>
-                      </m:rPr>
-                      <m:t>,</m:t>
-                    </m:r>
-                    <m:r>
-                      <m:t>2</m:t>
-                    </m:r>
-                    <m:r>
-                      <m:rPr>
-                        <m:sty m:val="p"/>
-                      </m:rPr>
-                      <m:t>,</m:t>
-                    </m:r>
-                    <m:r>
-                      <m:t>3</m:t>
-                    </m:r>
-                    <m:r>
-                      <m:rPr>
-                        <m:sty m:val="p"/>
-                      </m:rPr>
-                      <m:t>,</m:t>
-                    </m:r>
-                    <m:r>
-                      <m:rPr>
-                        <m:sty m:val="p"/>
-                      </m:rPr>
-                      <m:t>.</m:t>
-                    </m:r>
-                    <m:r>
-                      <m:rPr>
-                        <m:sty m:val="p"/>
-                      </m:rPr>
-                      <m:t>.</m:t>
-                    </m:r>
-                    <m:r>
-                      <m:rPr>
-                        <m:sty m:val="p"/>
-                      </m:rPr>
-                      <m:t>.</m:t>
-                    </m:r>
-                  </m:oMath>
-                </a14:m>
-              </a:p>
-              <a:p>
-                <a:pPr lvl="0"/>
-                <a:r>
-                  <a:rPr/>
-                  <a:t>We use subscripts to index the elements of a set: </a:t>
-                </a:r>
-                <a14:m>
-                  <m:oMath xmlns:m="http://schemas.openxmlformats.org/officeDocument/2006/math">
-                    <m:r>
-                      <m:t>X</m:t>
-                    </m:r>
-                    <m:r>
-                      <m:rPr>
-                        <m:sty m:val="p"/>
-                      </m:rPr>
-                      <m:t>=</m:t>
-                    </m:r>
-                    <m:r>
-                      <m:rPr>
-                        <m:sty m:val="p"/>
-                      </m:rPr>
-                      <m:t>{</m:t>
-                    </m:r>
-                    <m:sSub>
-                      <m:e>
-                        <m:r>
-                          <m:t>x</m:t>
+                          <m:t>e</m:t>
                         </m:r>
                       </m:e>
                       <m:sub>
@@ -4136,7 +4291,7 @@
                     <m:sSub>
                       <m:e>
                         <m:r>
-                          <m:t>x</m:t>
+                          <m:t>e</m:t>
                         </m:r>
                       </m:e>
                       <m:sub>
@@ -4151,39 +4306,15 @@
                       </m:rPr>
                       <m:t>,</m:t>
                     </m:r>
-                    <m:r>
-                      <m:rPr>
-                        <m:sty m:val="p"/>
-                      </m:rPr>
-                      <m:t>.</m:t>
-                    </m:r>
-                    <m:r>
-                      <m:rPr>
-                        <m:sty m:val="p"/>
-                      </m:rPr>
-                      <m:t>.</m:t>
-                    </m:r>
-                    <m:r>
-                      <m:rPr>
-                        <m:sty m:val="p"/>
-                      </m:rPr>
-                      <m:t>.</m:t>
-                    </m:r>
-                    <m:r>
-                      <m:rPr>
-                        <m:sty m:val="p"/>
-                      </m:rPr>
-                      <m:t>,</m:t>
-                    </m:r>
                     <m:sSub>
                       <m:e>
                         <m:r>
-                          <m:t>x</m:t>
+                          <m:t>e</m:t>
                         </m:r>
                       </m:e>
                       <m:sub>
                         <m:r>
-                          <m:t>n</m:t>
+                          <m:t>3</m:t>
                         </m:r>
                       </m:sub>
                     </m:sSub>
@@ -4191,35 +4322,143 @@
                       <m:rPr>
                         <m:sty m:val="p"/>
                       </m:rPr>
-                      <m:t>}</m:t>
-                    </m:r>
-                  </m:oMath>
-                </a14:m>
-                <a:r>
-                  <a:rPr/>
-                  <a:t> and </a:t>
-                </a:r>
-                <a14:m>
-                  <m:oMath xmlns:m="http://schemas.openxmlformats.org/officeDocument/2006/math">
-                    <m:r>
-                      <m:t>A</m:t>
-                    </m:r>
-                    <m:r>
-                      <m:rPr>
-                        <m:sty m:val="p"/>
-                      </m:rPr>
-                      <m:t>=</m:t>
-                    </m:r>
-                    <m:r>
-                      <m:rPr>
-                        <m:sty m:val="p"/>
-                      </m:rPr>
-                      <m:t>{</m:t>
+                      <m:t>,</m:t>
                     </m:r>
                     <m:sSub>
                       <m:e>
                         <m:r>
-                          <m:t>a</m:t>
+                          <m:t>e</m:t>
+                        </m:r>
+                      </m:e>
+                      <m:sub>
+                        <m:r>
+                          <m:t>4</m:t>
+                        </m:r>
+                      </m:sub>
+                    </m:sSub>
+                    <m:r>
+                      <m:rPr>
+                        <m:sty m:val="p"/>
+                      </m:rPr>
+                      <m:t>}</m:t>
+                    </m:r>
+                  </m:oMath>
+                </a14:m>
+              </a:p>
+              <a:p>
+                <a:pPr lvl="0" indent="-342900" marL="342900">
+                  <a:buAutoNum type="romanLcPeriod"/>
+                </a:pPr>
+                <a:r>
+                  <a:rPr sz="2000"/>
+                  <a:t>Consider a set of friends </a:t>
+                </a:r>
+                <a14:m>
+                  <m:oMath xmlns:m="http://schemas.openxmlformats.org/officeDocument/2006/math">
+                    <m:r>
+                      <m:t>F</m:t>
+                    </m:r>
+                  </m:oMath>
+                </a14:m>
+                <a:r>
+                  <a:rPr sz="2000"/>
+                  <a:t> = {Akeah, Brandon, Cris, Daveon, Evelyn}</a:t>
+                </a:r>
+              </a:p>
+              <a:p>
+                <a:pPr lvl="0" indent="-342900" marL="342900">
+                  <a:buAutoNum type="romanLcPeriod"/>
+                </a:pPr>
+                <a:r>
+                  <a:rPr sz="2000"/>
+                  <a:t>Consider a set of numbers </a:t>
+                </a:r>
+                <a14:m>
+                  <m:oMath xmlns:m="http://schemas.openxmlformats.org/officeDocument/2006/math">
+                    <m:r>
+                      <m:t>N</m:t>
+                    </m:r>
+                    <m:r>
+                      <m:rPr>
+                        <m:sty m:val="p"/>
+                      </m:rPr>
+                      <m:t>=</m:t>
+                    </m:r>
+                    <m:r>
+                      <m:rPr>
+                        <m:sty m:val="p"/>
+                      </m:rPr>
+                      <m:t>{</m:t>
+                    </m:r>
+                    <m:r>
+                      <m:t>1</m:t>
+                    </m:r>
+                    <m:r>
+                      <m:rPr>
+                        <m:sty m:val="p"/>
+                      </m:rPr>
+                      <m:t>,</m:t>
+                    </m:r>
+                    <m:r>
+                      <m:t>2</m:t>
+                    </m:r>
+                    <m:r>
+                      <m:rPr>
+                        <m:sty m:val="p"/>
+                      </m:rPr>
+                      <m:t>,</m:t>
+                    </m:r>
+                    <m:r>
+                      <m:t>3</m:t>
+                    </m:r>
+                    <m:r>
+                      <m:rPr>
+                        <m:sty m:val="p"/>
+                      </m:rPr>
+                      <m:t>,</m:t>
+                    </m:r>
+                    <m:r>
+                      <m:rPr>
+                        <m:sty m:val="p"/>
+                      </m:rPr>
+                      <m:t>.</m:t>
+                    </m:r>
+                    <m:r>
+                      <m:rPr>
+                        <m:sty m:val="p"/>
+                      </m:rPr>
+                      <m:t>.</m:t>
+                    </m:r>
+                    <m:r>
+                      <m:rPr>
+                        <m:sty m:val="p"/>
+                      </m:rPr>
+                      <m:t>.</m:t>
+                    </m:r>
+                    <m:r>
+                      <m:rPr>
+                        <m:sty m:val="p"/>
+                      </m:rPr>
+                      <m:t>}</m:t>
+                    </m:r>
+                  </m:oMath>
+                </a14:m>
+                <a:r>
+                  <a:rPr sz="2000"/>
+                  <a:t> = </a:t>
+                </a:r>
+                <a14:m>
+                  <m:oMath xmlns:m="http://schemas.openxmlformats.org/officeDocument/2006/math">
+                    <m:r>
+                      <m:rPr>
+                        <m:sty m:val="p"/>
+                      </m:rPr>
+                      <m:t>{</m:t>
+                    </m:r>
+                    <m:sSub>
+                      <m:e>
+                        <m:r>
+                          <m:t>n</m:t>
                         </m:r>
                       </m:e>
                       <m:sub>
@@ -4237,7 +4476,7 @@
                     <m:sSub>
                       <m:e>
                         <m:r>
-                          <m:t>a</m:t>
+                          <m:t>n</m:t>
                         </m:r>
                       </m:e>
                       <m:sub>
@@ -4252,39 +4491,15 @@
                       </m:rPr>
                       <m:t>,</m:t>
                     </m:r>
-                    <m:r>
-                      <m:rPr>
-                        <m:sty m:val="p"/>
-                      </m:rPr>
-                      <m:t>.</m:t>
-                    </m:r>
-                    <m:r>
-                      <m:rPr>
-                        <m:sty m:val="p"/>
-                      </m:rPr>
-                      <m:t>.</m:t>
-                    </m:r>
-                    <m:r>
-                      <m:rPr>
-                        <m:sty m:val="p"/>
-                      </m:rPr>
-                      <m:t>.</m:t>
-                    </m:r>
-                    <m:r>
-                      <m:rPr>
-                        <m:sty m:val="p"/>
-                      </m:rPr>
-                      <m:t>,</m:t>
-                    </m:r>
                     <m:sSub>
                       <m:e>
                         <m:r>
-                          <m:t>a</m:t>
+                          <m:t>n</m:t>
                         </m:r>
                       </m:e>
                       <m:sub>
                         <m:r>
-                          <m:t>n</m:t>
+                          <m:t>3</m:t>
                         </m:r>
                       </m:sub>
                     </m:sSub>
@@ -4292,13 +4507,115 @@
                       <m:rPr>
                         <m:sty m:val="p"/>
                       </m:rPr>
+                      <m:t>,</m:t>
+                    </m:r>
+                    <m:r>
+                      <m:rPr>
+                        <m:sty m:val="p"/>
+                      </m:rPr>
+                      <m:t>.</m:t>
+                    </m:r>
+                    <m:r>
+                      <m:rPr>
+                        <m:sty m:val="p"/>
+                      </m:rPr>
+                      <m:t>.</m:t>
+                    </m:r>
+                    <m:r>
+                      <m:rPr>
+                        <m:sty m:val="p"/>
+                      </m:rPr>
+                      <m:t>.</m:t>
+                    </m:r>
+                    <m:r>
+                      <m:rPr>
+                        <m:sty m:val="p"/>
+                      </m:rPr>
                       <m:t>}</m:t>
                     </m:r>
                   </m:oMath>
                 </a14:m>
                 <a:r>
-                  <a:rPr/>
-                  <a:t>.</a:t>
+                  <a:rPr sz="2000"/>
+                  <a:t>, so </a:t>
+                </a:r>
+                <a14:m>
+                  <m:oMath xmlns:m="http://schemas.openxmlformats.org/officeDocument/2006/math">
+                    <m:sSub>
+                      <m:e>
+                        <m:r>
+                          <m:t>n</m:t>
+                        </m:r>
+                      </m:e>
+                      <m:sub>
+                        <m:r>
+                          <m:t>1</m:t>
+                        </m:r>
+                      </m:sub>
+                    </m:sSub>
+                    <m:r>
+                      <m:rPr>
+                        <m:sty m:val="p"/>
+                      </m:rPr>
+                      <m:t>=</m:t>
+                    </m:r>
+                    <m:r>
+                      <m:t>1</m:t>
+                    </m:r>
+                  </m:oMath>
+                </a14:m>
+                <a:r>
+                  <a:rPr sz="2000"/>
+                  <a:t>, </a:t>
+                </a:r>
+                <a14:m>
+                  <m:oMath xmlns:m="http://schemas.openxmlformats.org/officeDocument/2006/math">
+                    <m:sSub>
+                      <m:e>
+                        <m:r>
+                          <m:t>n</m:t>
+                        </m:r>
+                      </m:e>
+                      <m:sub>
+                        <m:r>
+                          <m:t>2</m:t>
+                        </m:r>
+                      </m:sub>
+                    </m:sSub>
+                    <m:r>
+                      <m:rPr>
+                        <m:sty m:val="p"/>
+                      </m:rPr>
+                      <m:t>=</m:t>
+                    </m:r>
+                    <m:r>
+                      <m:t>2</m:t>
+                    </m:r>
+                  </m:oMath>
+                </a14:m>
+                <a:r>
+                  <a:rPr sz="2000"/>
+                  <a:t>, …</a:t>
+                </a:r>
+              </a:p>
+              <a:p>
+                <a:pPr lvl="0" indent="-342900" marL="342900">
+                  <a:buAutoNum type="romanLcPeriod"/>
+                </a:pPr>
+                <a:r>
+                  <a:rPr sz="2000"/>
+                  <a:t>Consider a set of sets </a:t>
+                </a:r>
+                <a14:m>
+                  <m:oMath xmlns:m="http://schemas.openxmlformats.org/officeDocument/2006/math">
+                    <m:r>
+                      <m:t>S</m:t>
+                    </m:r>
+                  </m:oMath>
+                </a14:m>
+                <a:r>
+                  <a:rPr sz="2000"/>
+                  <a:t> = {{laptop, phone, tablet, watch}, {1, 2, 3, …}, …}</a:t>
                 </a:r>
               </a:p>
             </p:txBody>
@@ -4327,574 +4644,87 @@
           <a:chExt cx="0" cy="0"/>
         </a:xfrm>
       </p:grpSpPr>
-      <mc:AlternateContent xmlns:mc="http://schemas.openxmlformats.org/markup-compatibility/2006">
-        <mc:Choice xmlns:a14="http://schemas.microsoft.com/office/drawing/2010/main" Requires="a14">
-          <p:sp>
-            <p:nvSpPr>
-              <p:cNvPr id="3" name="Content Placeholder 2"/>
-              <p:cNvSpPr>
-                <a:spLocks noGrp="1"/>
-              </p:cNvSpPr>
-              <p:nvPr>
-                <p:ph idx="1"/>
-              </p:nvPr>
-            </p:nvSpPr>
-            <p:spPr/>
-            <p:txBody>
-              <a:bodyPr/>
-              <a:lstStyle/>
-              <a:p>
-                <a:pPr lvl="0" indent="0" marL="1270000">
-                  <a:buNone/>
-                </a:pPr>
-                <a:r>
-                  <a:rPr sz="2000" b="1"/>
-                  <a:t>EXAMPLES – Sets as a collection of elements or items</a:t>
-                </a:r>
-              </a:p>
-              <a:p>
-                <a:pPr lvl="0" indent="0" marL="1270000">
-                  <a:buNone/>
-                </a:pPr>
-                <a:r>
-                  <a:rPr sz="2000"/>
-                  <a:t>Sets can be defined in many different ways.</a:t>
-                </a:r>
-              </a:p>
-              <a:p>
-                <a:pPr lvl="0" indent="-342900" marL="342900">
-                  <a:buAutoNum type="romanLcPeriod"/>
-                </a:pPr>
-                <a:r>
-                  <a:rPr sz="2000"/>
-                  <a:t>Consider a set of electronics </a:t>
-                </a:r>
-                <a14:m>
-                  <m:oMath xmlns:m="http://schemas.openxmlformats.org/officeDocument/2006/math">
-                    <m:r>
-                      <m:t>E</m:t>
-                    </m:r>
-                  </m:oMath>
-                </a14:m>
-                <a:r>
-                  <a:rPr sz="2000"/>
-                  <a:t> = {laptop, phone, tablet, watch} = </a:t>
-                </a:r>
-                <a14:m>
-                  <m:oMath xmlns:m="http://schemas.openxmlformats.org/officeDocument/2006/math">
-                    <m:r>
-                      <m:rPr>
-                        <m:sty m:val="p"/>
-                      </m:rPr>
-                      <m:t>{</m:t>
-                    </m:r>
-                    <m:sSub>
-                      <m:e>
-                        <m:r>
-                          <m:t>e</m:t>
-                        </m:r>
-                      </m:e>
-                      <m:sub>
-                        <m:r>
-                          <m:t>1</m:t>
-                        </m:r>
-                      </m:sub>
-                    </m:sSub>
-                    <m:r>
-                      <m:rPr>
-                        <m:sty m:val="p"/>
-                      </m:rPr>
-                      <m:t>,</m:t>
-                    </m:r>
-                    <m:sSub>
-                      <m:e>
-                        <m:r>
-                          <m:t>e</m:t>
-                        </m:r>
-                      </m:e>
-                      <m:sub>
-                        <m:r>
-                          <m:t>2</m:t>
-                        </m:r>
-                      </m:sub>
-                    </m:sSub>
-                    <m:r>
-                      <m:rPr>
-                        <m:sty m:val="p"/>
-                      </m:rPr>
-                      <m:t>,</m:t>
-                    </m:r>
-                    <m:sSub>
-                      <m:e>
-                        <m:r>
-                          <m:t>e</m:t>
-                        </m:r>
-                      </m:e>
-                      <m:sub>
-                        <m:r>
-                          <m:t>3</m:t>
-                        </m:r>
-                      </m:sub>
-                    </m:sSub>
-                    <m:r>
-                      <m:rPr>
-                        <m:sty m:val="p"/>
-                      </m:rPr>
-                      <m:t>,</m:t>
-                    </m:r>
-                    <m:sSub>
-                      <m:e>
-                        <m:r>
-                          <m:t>e</m:t>
-                        </m:r>
-                      </m:e>
-                      <m:sub>
-                        <m:r>
-                          <m:t>4</m:t>
-                        </m:r>
-                      </m:sub>
-                    </m:sSub>
-                    <m:r>
-                      <m:rPr>
-                        <m:sty m:val="p"/>
-                      </m:rPr>
-                      <m:t>}</m:t>
-                    </m:r>
-                  </m:oMath>
-                </a14:m>
-              </a:p>
-              <a:p>
-                <a:pPr lvl="0" indent="-342900" marL="342900">
-                  <a:buAutoNum type="romanLcPeriod"/>
-                </a:pPr>
-                <a:r>
-                  <a:rPr sz="2000"/>
-                  <a:t>Consider a set of friends </a:t>
-                </a:r>
-                <a14:m>
-                  <m:oMath xmlns:m="http://schemas.openxmlformats.org/officeDocument/2006/math">
-                    <m:r>
-                      <m:t>F</m:t>
-                    </m:r>
-                  </m:oMath>
-                </a14:m>
-                <a:r>
-                  <a:rPr sz="2000"/>
-                  <a:t> = {Akeah, Brandon, Cris, Daveon, Evelyn}</a:t>
-                </a:r>
-              </a:p>
-              <a:p>
-                <a:pPr lvl="0" indent="-342900" marL="342900">
-                  <a:buAutoNum type="romanLcPeriod"/>
-                </a:pPr>
-                <a:r>
-                  <a:rPr sz="2000"/>
-                  <a:t>Consider a set of numbers </a:t>
-                </a:r>
-                <a14:m>
-                  <m:oMath xmlns:m="http://schemas.openxmlformats.org/officeDocument/2006/math">
-                    <m:r>
-                      <m:t>N</m:t>
-                    </m:r>
-                    <m:r>
-                      <m:rPr>
-                        <m:sty m:val="p"/>
-                      </m:rPr>
-                      <m:t>=</m:t>
-                    </m:r>
-                    <m:r>
-                      <m:rPr>
-                        <m:sty m:val="p"/>
-                      </m:rPr>
-                      <m:t>{</m:t>
-                    </m:r>
-                    <m:r>
-                      <m:t>1</m:t>
-                    </m:r>
-                    <m:r>
-                      <m:rPr>
-                        <m:sty m:val="p"/>
-                      </m:rPr>
-                      <m:t>,</m:t>
-                    </m:r>
-                    <m:r>
-                      <m:t>2</m:t>
-                    </m:r>
-                    <m:r>
-                      <m:rPr>
-                        <m:sty m:val="p"/>
-                      </m:rPr>
-                      <m:t>,</m:t>
-                    </m:r>
-                    <m:r>
-                      <m:t>3</m:t>
-                    </m:r>
-                    <m:r>
-                      <m:rPr>
-                        <m:sty m:val="p"/>
-                      </m:rPr>
-                      <m:t>,</m:t>
-                    </m:r>
-                    <m:r>
-                      <m:rPr>
-                        <m:sty m:val="p"/>
-                      </m:rPr>
-                      <m:t>.</m:t>
-                    </m:r>
-                    <m:r>
-                      <m:rPr>
-                        <m:sty m:val="p"/>
-                      </m:rPr>
-                      <m:t>.</m:t>
-                    </m:r>
-                    <m:r>
-                      <m:rPr>
-                        <m:sty m:val="p"/>
-                      </m:rPr>
-                      <m:t>.</m:t>
-                    </m:r>
-                    <m:r>
-                      <m:rPr>
-                        <m:sty m:val="p"/>
-                      </m:rPr>
-                      <m:t>}</m:t>
-                    </m:r>
-                  </m:oMath>
-                </a14:m>
-                <a:r>
-                  <a:rPr sz="2000"/>
-                  <a:t> = </a:t>
-                </a:r>
-                <a14:m>
-                  <m:oMath xmlns:m="http://schemas.openxmlformats.org/officeDocument/2006/math">
-                    <m:r>
-                      <m:rPr>
-                        <m:sty m:val="p"/>
-                      </m:rPr>
-                      <m:t>{</m:t>
-                    </m:r>
-                    <m:sSub>
-                      <m:e>
-                        <m:r>
-                          <m:t>n</m:t>
-                        </m:r>
-                      </m:e>
-                      <m:sub>
-                        <m:r>
-                          <m:t>1</m:t>
-                        </m:r>
-                      </m:sub>
-                    </m:sSub>
-                    <m:r>
-                      <m:rPr>
-                        <m:sty m:val="p"/>
-                      </m:rPr>
-                      <m:t>,</m:t>
-                    </m:r>
-                    <m:sSub>
-                      <m:e>
-                        <m:r>
-                          <m:t>n</m:t>
-                        </m:r>
-                      </m:e>
-                      <m:sub>
-                        <m:r>
-                          <m:t>2</m:t>
-                        </m:r>
-                      </m:sub>
-                    </m:sSub>
-                    <m:r>
-                      <m:rPr>
-                        <m:sty m:val="p"/>
-                      </m:rPr>
-                      <m:t>,</m:t>
-                    </m:r>
-                    <m:sSub>
-                      <m:e>
-                        <m:r>
-                          <m:t>n</m:t>
-                        </m:r>
-                      </m:e>
-                      <m:sub>
-                        <m:r>
-                          <m:t>3</m:t>
-                        </m:r>
-                      </m:sub>
-                    </m:sSub>
-                    <m:r>
-                      <m:rPr>
-                        <m:sty m:val="p"/>
-                      </m:rPr>
-                      <m:t>,</m:t>
-                    </m:r>
-                    <m:r>
-                      <m:rPr>
-                        <m:sty m:val="p"/>
-                      </m:rPr>
-                      <m:t>.</m:t>
-                    </m:r>
-                    <m:r>
-                      <m:rPr>
-                        <m:sty m:val="p"/>
-                      </m:rPr>
-                      <m:t>.</m:t>
-                    </m:r>
-                    <m:r>
-                      <m:rPr>
-                        <m:sty m:val="p"/>
-                      </m:rPr>
-                      <m:t>.</m:t>
-                    </m:r>
-                    <m:r>
-                      <m:rPr>
-                        <m:sty m:val="p"/>
-                      </m:rPr>
-                      <m:t>}</m:t>
-                    </m:r>
-                  </m:oMath>
-                </a14:m>
-                <a:r>
-                  <a:rPr sz="2000"/>
-                  <a:t>, so </a:t>
-                </a:r>
-                <a14:m>
-                  <m:oMath xmlns:m="http://schemas.openxmlformats.org/officeDocument/2006/math">
-                    <m:sSub>
-                      <m:e>
-                        <m:r>
-                          <m:t>n</m:t>
-                        </m:r>
-                      </m:e>
-                      <m:sub>
-                        <m:r>
-                          <m:t>1</m:t>
-                        </m:r>
-                      </m:sub>
-                    </m:sSub>
-                    <m:r>
-                      <m:rPr>
-                        <m:sty m:val="p"/>
-                      </m:rPr>
-                      <m:t>=</m:t>
-                    </m:r>
-                    <m:r>
-                      <m:t>1</m:t>
-                    </m:r>
-                  </m:oMath>
-                </a14:m>
-                <a:r>
-                  <a:rPr sz="2000"/>
-                  <a:t>, </a:t>
-                </a:r>
-                <a14:m>
-                  <m:oMath xmlns:m="http://schemas.openxmlformats.org/officeDocument/2006/math">
-                    <m:sSub>
-                      <m:e>
-                        <m:r>
-                          <m:t>n</m:t>
-                        </m:r>
-                      </m:e>
-                      <m:sub>
-                        <m:r>
-                          <m:t>2</m:t>
-                        </m:r>
-                      </m:sub>
-                    </m:sSub>
-                    <m:r>
-                      <m:rPr>
-                        <m:sty m:val="p"/>
-                      </m:rPr>
-                      <m:t>=</m:t>
-                    </m:r>
-                    <m:r>
-                      <m:t>2</m:t>
-                    </m:r>
-                  </m:oMath>
-                </a14:m>
-                <a:r>
-                  <a:rPr sz="2000"/>
-                  <a:t>, …</a:t>
-                </a:r>
-              </a:p>
-              <a:p>
-                <a:pPr lvl="0" indent="-342900" marL="342900">
-                  <a:buAutoNum type="romanLcPeriod"/>
-                </a:pPr>
-                <a:r>
-                  <a:rPr sz="2000"/>
-                  <a:t>Consider a set of sets </a:t>
-                </a:r>
-                <a14:m>
-                  <m:oMath xmlns:m="http://schemas.openxmlformats.org/officeDocument/2006/math">
-                    <m:r>
-                      <m:t>S</m:t>
-                    </m:r>
-                  </m:oMath>
-                </a14:m>
-                <a:r>
-                  <a:rPr sz="2000"/>
-                  <a:t> = {{laptop, phone, tablet, watch}, {1, 2, 3, …}, …}</a:t>
-                </a:r>
-              </a:p>
-            </p:txBody>
-          </p:sp>
-        </mc:Choice>
-      </mc:AlternateContent>
+      <p:sp>
+        <p:nvSpPr>
+          <p:cNvPr id="3" name="Content Placeholder 2"/>
+          <p:cNvSpPr>
+            <a:spLocks noGrp="1"/>
+          </p:cNvSpPr>
+          <p:nvPr>
+            <p:ph idx="1"/>
+          </p:nvPr>
+        </p:nvSpPr>
+        <p:spPr/>
+        <p:txBody>
+          <a:bodyPr/>
+          <a:lstStyle/>
+          <a:p>
+            <a:pPr lvl="0" indent="0" marL="0">
+              <a:buNone/>
+            </a:pPr>
+            <a:r>
+              <a:rPr/>
+              <a:t>Quantifying elements of a set allows us to perform mathematical </a:t>
+            </a:r>
+            <a:r>
+              <a:rPr i="1"/>
+              <a:t>operations</a:t>
+            </a:r>
+            <a:r>
+              <a:rPr/>
+              <a:t> on those elements.</a:t>
+            </a:r>
+          </a:p>
+          <a:p>
+            <a:pPr lvl="0" indent="0" marL="0">
+              <a:buNone/>
+            </a:pPr>
+            <a:r>
+              <a:rPr/>
+              <a:t>Together, the elements and operations combine to create </a:t>
+            </a:r>
+            <a:r>
+              <a:rPr i="1"/>
+              <a:t>equations</a:t>
+            </a:r>
+            <a:r>
+              <a:rPr/>
+              <a:t>, </a:t>
+            </a:r>
+            <a:r>
+              <a:rPr i="1"/>
+              <a:t>functions</a:t>
+            </a:r>
+            <a:r>
+              <a:rPr/>
+              <a:t>, and </a:t>
+            </a:r>
+            <a:r>
+              <a:rPr i="1"/>
+              <a:t>models</a:t>
+            </a:r>
+            <a:r>
+              <a:rPr/>
+              <a:t> that help us understand and communicate details about the elements of a set – which is a form of data.</a:t>
+            </a:r>
+          </a:p>
+          <a:p>
+            <a:pPr lvl="0" indent="0" marL="0">
+              <a:buNone/>
+            </a:pPr>
+            <a:r>
+              <a:rPr/>
+              <a:t>We will need a host of math concepts. The different sets of numbers can be a fun starting point.</a:t>
+            </a:r>
+          </a:p>
+        </p:txBody>
+      </p:sp>
     </p:spTree>
   </p:cSld>
 </p:sld>
 </file>
 
 <file path=ppt/slides/slide19.xml><?xml version="1.0" encoding="utf-8"?>
-<p:sld xmlns:a="http://schemas.openxmlformats.org/drawingml/2006/main" xmlns:r="http://schemas.openxmlformats.org/officeDocument/2006/relationships" xmlns:p="http://schemas.openxmlformats.org/presentationml/2006/main">
-  <p:cSld>
-    <p:spTree>
-      <p:nvGrpSpPr>
-        <p:cNvPr id="1" name=""/>
-        <p:cNvGrpSpPr/>
-        <p:nvPr/>
-      </p:nvGrpSpPr>
-      <p:grpSpPr>
-        <a:xfrm>
-          <a:off x="0" y="0"/>
-          <a:ext cx="0" cy="0"/>
-          <a:chOff x="0" y="0"/>
-          <a:chExt cx="0" cy="0"/>
-        </a:xfrm>
-      </p:grpSpPr>
-      <p:sp>
-        <p:nvSpPr>
-          <p:cNvPr id="3" name="Content Placeholder 2"/>
-          <p:cNvSpPr>
-            <a:spLocks noGrp="1"/>
-          </p:cNvSpPr>
-          <p:nvPr>
-            <p:ph idx="1"/>
-          </p:nvPr>
-        </p:nvSpPr>
-        <p:spPr/>
-        <p:txBody>
-          <a:bodyPr/>
-          <a:lstStyle/>
-          <a:p>
-            <a:pPr lvl="0" indent="0" marL="0">
-              <a:buNone/>
-            </a:pPr>
-            <a:r>
-              <a:rPr/>
-              <a:t>Quantifying elements of a set allows us to perform mathematical </a:t>
-            </a:r>
-            <a:r>
-              <a:rPr i="1"/>
-              <a:t>operations</a:t>
-            </a:r>
-            <a:r>
-              <a:rPr/>
-              <a:t> on those elements.</a:t>
-            </a:r>
-          </a:p>
-          <a:p>
-            <a:pPr lvl="0" indent="0" marL="0">
-              <a:buNone/>
-            </a:pPr>
-            <a:r>
-              <a:rPr/>
-              <a:t>Together, the elements and operations combine to create </a:t>
-            </a:r>
-            <a:r>
-              <a:rPr i="1"/>
-              <a:t>equations</a:t>
-            </a:r>
-            <a:r>
-              <a:rPr/>
-              <a:t>, </a:t>
-            </a:r>
-            <a:r>
-              <a:rPr i="1"/>
-              <a:t>functions</a:t>
-            </a:r>
-            <a:r>
-              <a:rPr/>
-              <a:t>, and </a:t>
-            </a:r>
-            <a:r>
-              <a:rPr i="1"/>
-              <a:t>models</a:t>
-            </a:r>
-            <a:r>
-              <a:rPr/>
-              <a:t> that help us understand and communicate details about the elements of a set – which is a form of data.</a:t>
-            </a:r>
-          </a:p>
-          <a:p>
-            <a:pPr lvl="0" indent="0" marL="0">
-              <a:buNone/>
-            </a:pPr>
-            <a:r>
-              <a:rPr/>
-              <a:t>We will need a host of math concepts. The different sets of numbers can be a fun starting point.</a:t>
-            </a:r>
-          </a:p>
-        </p:txBody>
-      </p:sp>
-    </p:spTree>
-  </p:cSld>
-</p:sld>
-</file>
-
-<file path=ppt/slides/slide2.xml><?xml version="1.0" encoding="utf-8"?>
-<p:sld xmlns:a="http://schemas.openxmlformats.org/drawingml/2006/main" xmlns:r="http://schemas.openxmlformats.org/officeDocument/2006/relationships" xmlns:p="http://schemas.openxmlformats.org/presentationml/2006/main">
-  <p:cSld>
-    <p:spTree>
-      <p:nvGrpSpPr>
-        <p:cNvPr id="1" name=""/>
-        <p:cNvGrpSpPr/>
-        <p:nvPr/>
-      </p:nvGrpSpPr>
-      <p:grpSpPr>
-        <a:xfrm>
-          <a:off x="0" y="0"/>
-          <a:ext cx="0" cy="0"/>
-          <a:chOff x="0" y="0"/>
-          <a:chExt cx="0" cy="0"/>
-        </a:xfrm>
-      </p:grpSpPr>
-      <p:sp>
-        <p:nvSpPr>
-          <p:cNvPr id="2" name="Title 1"/>
-          <p:cNvSpPr>
-            <a:spLocks noGrp="1"/>
-          </p:cNvSpPr>
-          <p:nvPr>
-            <p:ph type="title"/>
-          </p:nvPr>
-        </p:nvSpPr>
-        <p:spPr>
-          <a:xfrm>
-            <a:off x="722313" y="3305176"/>
-            <a:ext cx="7772400" cy="1021556"/>
-          </a:xfrm>
-        </p:spPr>
-        <p:txBody>
-          <a:bodyPr/>
-          <a:lstStyle/>
-          <a:p>
-            <a:pPr lvl="0" indent="0" marL="0">
-              <a:buNone/>
-            </a:pPr>
-            <a:r>
-              <a:rPr/>
-              <a:t>Part I: Context</a:t>
-            </a:r>
-          </a:p>
-        </p:txBody>
-      </p:sp>
-    </p:spTree>
-  </p:cSld>
-</p:sld>
-</file>
-
-<file path=ppt/slides/slide20.xml><?xml version="1.0" encoding="utf-8"?>
 <p:sld xmlns:a="http://schemas.openxmlformats.org/drawingml/2006/main" xmlns:r="http://schemas.openxmlformats.org/officeDocument/2006/relationships" xmlns:p="http://schemas.openxmlformats.org/presentationml/2006/main">
   <p:cSld>
     <p:spTree>
@@ -5432,7 +5262,59 @@
 </p:sld>
 </file>
 
-<file path=ppt/slides/slide21.xml><?xml version="1.0" encoding="utf-8"?>
+<file path=ppt/slides/slide2.xml><?xml version="1.0" encoding="utf-8"?>
+<p:sld xmlns:a="http://schemas.openxmlformats.org/drawingml/2006/main" xmlns:r="http://schemas.openxmlformats.org/officeDocument/2006/relationships" xmlns:p="http://schemas.openxmlformats.org/presentationml/2006/main">
+  <p:cSld>
+    <p:spTree>
+      <p:nvGrpSpPr>
+        <p:cNvPr id="1" name=""/>
+        <p:cNvGrpSpPr/>
+        <p:nvPr/>
+      </p:nvGrpSpPr>
+      <p:grpSpPr>
+        <a:xfrm>
+          <a:off x="0" y="0"/>
+          <a:ext cx="0" cy="0"/>
+          <a:chOff x="0" y="0"/>
+          <a:chExt cx="0" cy="0"/>
+        </a:xfrm>
+      </p:grpSpPr>
+      <p:sp>
+        <p:nvSpPr>
+          <p:cNvPr id="2" name="Title 1"/>
+          <p:cNvSpPr>
+            <a:spLocks noGrp="1"/>
+          </p:cNvSpPr>
+          <p:nvPr>
+            <p:ph type="title"/>
+          </p:nvPr>
+        </p:nvSpPr>
+        <p:spPr>
+          <a:xfrm>
+            <a:off x="722313" y="3305176"/>
+            <a:ext cx="7772400" cy="1021556"/>
+          </a:xfrm>
+        </p:spPr>
+        <p:txBody>
+          <a:bodyPr/>
+          <a:lstStyle/>
+          <a:p>
+            <a:pPr lvl="0" indent="0" marL="0">
+              <a:buNone/>
+            </a:pPr>
+            <a:r>
+              <a:rPr/>
+              <a:t>Part I: Context</a:t>
+            </a:r>
+          </a:p>
+        </p:txBody>
+      </p:sp>
+    </p:spTree>
+  </p:cSld>
+</p:sld>
+</file>
+
+<file path=ppt/slides/slide20.xml><?xml version="1.0" encoding="utf-8"?>
 <p:sld xmlns:a="http://schemas.openxmlformats.org/drawingml/2006/main" xmlns:r="http://schemas.openxmlformats.org/officeDocument/2006/relationships" xmlns:p="http://schemas.openxmlformats.org/presentationml/2006/main">
   <p:cSld>
     <p:spTree>
@@ -5849,6 +5731,58 @@
 </p:sld>
 </file>
 
+<file path=ppt/slides/slide21.xml><?xml version="1.0" encoding="utf-8"?>
+<p:sld xmlns:a="http://schemas.openxmlformats.org/drawingml/2006/main" xmlns:r="http://schemas.openxmlformats.org/officeDocument/2006/relationships" xmlns:p="http://schemas.openxmlformats.org/presentationml/2006/main">
+  <p:cSld>
+    <p:spTree>
+      <p:nvGrpSpPr>
+        <p:cNvPr id="1" name=""/>
+        <p:cNvGrpSpPr/>
+        <p:nvPr/>
+      </p:nvGrpSpPr>
+      <p:grpSpPr>
+        <a:xfrm>
+          <a:off x="0" y="0"/>
+          <a:ext cx="0" cy="0"/>
+          <a:chOff x="0" y="0"/>
+          <a:chExt cx="0" cy="0"/>
+        </a:xfrm>
+      </p:grpSpPr>
+      <p:sp>
+        <p:nvSpPr>
+          <p:cNvPr id="2" name="Title 1"/>
+          <p:cNvSpPr>
+            <a:spLocks noGrp="1"/>
+          </p:cNvSpPr>
+          <p:nvPr>
+            <p:ph type="title"/>
+          </p:nvPr>
+        </p:nvSpPr>
+        <p:spPr>
+          <a:xfrm>
+            <a:off x="722313" y="3305176"/>
+            <a:ext cx="7772400" cy="1021556"/>
+          </a:xfrm>
+        </p:spPr>
+        <p:txBody>
+          <a:bodyPr/>
+          <a:lstStyle/>
+          <a:p>
+            <a:pPr lvl="0" indent="0" marL="0">
+              <a:buNone/>
+            </a:pPr>
+            <a:r>
+              <a:rPr/>
+              <a:t>Part III: Code</a:t>
+            </a:r>
+          </a:p>
+        </p:txBody>
+      </p:sp>
+    </p:spTree>
+  </p:cSld>
+</p:sld>
+</file>
+
 <file path=ppt/slides/slide22.xml><?xml version="1.0" encoding="utf-8"?>
 <p:sld xmlns:a="http://schemas.openxmlformats.org/drawingml/2006/main" xmlns:r="http://schemas.openxmlformats.org/officeDocument/2006/relationships" xmlns:p="http://schemas.openxmlformats.org/presentationml/2006/main">
   <p:cSld>
@@ -5876,12 +5810,7 @@
             <p:ph type="title"/>
           </p:nvPr>
         </p:nvSpPr>
-        <p:spPr>
-          <a:xfrm>
-            <a:off x="722313" y="3305176"/>
-            <a:ext cx="7772400" cy="1021556"/>
-          </a:xfrm>
-        </p:spPr>
+        <p:spPr/>
         <p:txBody>
           <a:bodyPr/>
           <a:lstStyle/>
@@ -5891,7 +5820,51 @@
             </a:pPr>
             <a:r>
               <a:rPr/>
-              <a:t>Part III: Code</a:t>
+              <a:t>Getting started in RStudio</a:t>
+            </a:r>
+          </a:p>
+        </p:txBody>
+      </p:sp>
+      <p:sp>
+        <p:nvSpPr>
+          <p:cNvPr id="3" name="Content Placeholder 2"/>
+          <p:cNvSpPr>
+            <a:spLocks noGrp="1"/>
+          </p:cNvSpPr>
+          <p:nvPr>
+            <p:ph idx="1"/>
+          </p:nvPr>
+        </p:nvSpPr>
+        <p:spPr/>
+        <p:txBody>
+          <a:bodyPr/>
+          <a:lstStyle/>
+          <a:p>
+            <a:pPr lvl="0" indent="0" marL="0">
+              <a:buNone/>
+            </a:pPr>
+            <a:r>
+              <a:rPr/>
+              <a:t>In </a:t>
+            </a:r>
+            <a:r>
+              <a:rPr>
+                <a:hlinkClick r:id="rId2"/>
+              </a:rPr>
+              <a:t>Lab 0</a:t>
+            </a:r>
+            <a:r>
+              <a:rPr/>
+              <a:t>, you downloaded and installed base R and RStudio. In this section, we will learn more about R and RStudio.</a:t>
+            </a:r>
+          </a:p>
+          <a:p>
+            <a:pPr lvl="0" indent="0" marL="0">
+              <a:buNone/>
+            </a:pPr>
+            <a:r>
+              <a:rPr/>
+              <a:t>Let’s start with a little fun!</a:t>
             </a:r>
           </a:p>
         </p:txBody>
@@ -5920,12 +5893,12 @@
       </p:grpSpPr>
       <p:sp>
         <p:nvSpPr>
-          <p:cNvPr id="2" name="Title 1"/>
-          <p:cNvSpPr>
-            <a:spLocks noGrp="1"/>
-          </p:cNvSpPr>
-          <p:nvPr>
-            <p:ph type="title"/>
+          <p:cNvPr id="3" name="Content Placeholder 2"/>
+          <p:cNvSpPr>
+            <a:spLocks noGrp="1"/>
+          </p:cNvSpPr>
+          <p:nvPr>
+            <p:ph idx="1"/>
           </p:nvPr>
         </p:nvSpPr>
         <p:spPr/>
@@ -5938,51 +5911,7 @@
             </a:pPr>
             <a:r>
               <a:rPr/>
-              <a:t>Getting started in RStudio</a:t>
-            </a:r>
-          </a:p>
-        </p:txBody>
-      </p:sp>
-      <p:sp>
-        <p:nvSpPr>
-          <p:cNvPr id="3" name="Content Placeholder 2"/>
-          <p:cNvSpPr>
-            <a:spLocks noGrp="1"/>
-          </p:cNvSpPr>
-          <p:nvPr>
-            <p:ph idx="1"/>
-          </p:nvPr>
-        </p:nvSpPr>
-        <p:spPr/>
-        <p:txBody>
-          <a:bodyPr/>
-          <a:lstStyle/>
-          <a:p>
-            <a:pPr lvl="0" indent="0" marL="0">
-              <a:buNone/>
-            </a:pPr>
-            <a:r>
-              <a:rPr/>
-              <a:t>In </a:t>
-            </a:r>
-            <a:r>
-              <a:rPr>
-                <a:hlinkClick r:id="rId2"/>
-              </a:rPr>
-              <a:t>Lab 0</a:t>
-            </a:r>
-            <a:r>
-              <a:rPr/>
-              <a:t>, you downloaded and installed base R and RStudio. In this section, we will learn more about R and RStudio.</a:t>
-            </a:r>
-          </a:p>
-          <a:p>
-            <a:pPr lvl="0" indent="0" marL="0">
-              <a:buNone/>
-            </a:pPr>
-            <a:r>
-              <a:rPr/>
-              <a:t>Let’s start with a little fun!</a:t>
+              <a:t>First, install the ‘praise’ package.</a:t>
             </a:r>
           </a:p>
         </p:txBody>
@@ -6029,7 +5958,7 @@
             </a:pPr>
             <a:r>
               <a:rPr/>
-              <a:t>First, install the ‘praise’ package.</a:t>
+              <a:t>Next, load the library for the ‘praise’ package.</a:t>
             </a:r>
           </a:p>
         </p:txBody>
@@ -6076,7 +6005,16 @@
             </a:pPr>
             <a:r>
               <a:rPr/>
-              <a:t>Next, load the library for the ‘praise’ package.</a:t>
+              <a:t>Now, get some praise!</a:t>
+            </a:r>
+          </a:p>
+          <a:p>
+            <a:pPr lvl="0" indent="0" marL="0">
+              <a:buNone/>
+            </a:pPr>
+            <a:r>
+              <a:rPr/>
+              <a:t>You can keep inserting the code above to get praise when you need it!</a:t>
             </a:r>
           </a:p>
         </p:txBody>
@@ -6105,6 +6043,31 @@
       </p:grpSpPr>
       <p:sp>
         <p:nvSpPr>
+          <p:cNvPr id="2" name="Title 1"/>
+          <p:cNvSpPr>
+            <a:spLocks noGrp="1"/>
+          </p:cNvSpPr>
+          <p:nvPr>
+            <p:ph type="title"/>
+          </p:nvPr>
+        </p:nvSpPr>
+        <p:spPr/>
+        <p:txBody>
+          <a:bodyPr/>
+          <a:lstStyle/>
+          <a:p>
+            <a:pPr lvl="0" indent="0" marL="0">
+              <a:buNone/>
+            </a:pPr>
+            <a:r>
+              <a:rPr/>
+              <a:t>Arithmetic in R</a:t>
+            </a:r>
+          </a:p>
+        </p:txBody>
+      </p:sp>
+      <p:sp>
+        <p:nvSpPr>
           <p:cNvPr id="3" name="Content Placeholder 2"/>
           <p:cNvSpPr>
             <a:spLocks noGrp="1"/>
@@ -6123,16 +6086,7 @@
             </a:pPr>
             <a:r>
               <a:rPr/>
-              <a:t>Now, get some praise!</a:t>
-            </a:r>
-          </a:p>
-          <a:p>
-            <a:pPr lvl="0" indent="0" marL="0">
-              <a:buNone/>
-            </a:pPr>
-            <a:r>
-              <a:rPr/>
-              <a:t>You can keep inserting the code above to get praise when you need it!</a:t>
+              <a:t>We will learn how to calculate values in R.</a:t>
             </a:r>
           </a:p>
         </p:txBody>
@@ -6161,12 +6115,12 @@
       </p:grpSpPr>
       <p:sp>
         <p:nvSpPr>
-          <p:cNvPr id="2" name="Title 1"/>
-          <p:cNvSpPr>
-            <a:spLocks noGrp="1"/>
-          </p:cNvSpPr>
-          <p:nvPr>
-            <p:ph type="title"/>
+          <p:cNvPr id="3" name="Content Placeholder 2"/>
+          <p:cNvSpPr>
+            <a:spLocks noGrp="1"/>
+          </p:cNvSpPr>
+          <p:nvPr>
+            <p:ph idx="1"/>
           </p:nvPr>
         </p:nvSpPr>
         <p:spPr/>
@@ -6174,37 +6128,14 @@
           <a:bodyPr/>
           <a:lstStyle/>
           <a:p>
-            <a:pPr lvl="0" indent="0" marL="0">
+            <a:pPr lvl="0" indent="0">
               <a:buNone/>
             </a:pPr>
             <a:r>
-              <a:rPr/>
-              <a:t>Arithmetic in R</a:t>
-            </a:r>
-          </a:p>
-        </p:txBody>
-      </p:sp>
-      <p:sp>
-        <p:nvSpPr>
-          <p:cNvPr id="3" name="Content Placeholder 2"/>
-          <p:cNvSpPr>
-            <a:spLocks noGrp="1"/>
-          </p:cNvSpPr>
-          <p:nvPr>
-            <p:ph idx="1"/>
-          </p:nvPr>
-        </p:nvSpPr>
-        <p:spPr/>
-        <p:txBody>
-          <a:bodyPr/>
-          <a:lstStyle/>
-          <a:p>
-            <a:pPr lvl="0" indent="0" marL="0">
-              <a:buNone/>
-            </a:pPr>
-            <a:r>
-              <a:rPr/>
-              <a:t>We will learn how to calculate values in R.</a:t>
+              <a:rPr>
+                <a:latin typeface="Courier"/>
+              </a:rPr>
+              <a:t>[1] 3</a:t>
             </a:r>
           </a:p>
         </p:txBody>
@@ -6253,7 +6184,7 @@
               <a:rPr>
                 <a:latin typeface="Courier"/>
               </a:rPr>
-              <a:t>[1] 3</a:t>
+              <a:t>[1] -1</a:t>
             </a:r>
           </a:p>
         </p:txBody>
@@ -6302,7 +6233,7 @@
               <a:rPr>
                 <a:latin typeface="Courier"/>
               </a:rPr>
-              <a:t>[1] -1</a:t>
+              <a:t>[1] 12</a:t>
             </a:r>
           </a:p>
         </p:txBody>
@@ -6454,7 +6385,7 @@
               <a:rPr>
                 <a:latin typeface="Courier"/>
               </a:rPr>
-              <a:t>[1] 12</a:t>
+              <a:t>[1] 0.8</a:t>
             </a:r>
           </a:p>
         </p:txBody>
@@ -6503,7 +6434,7 @@
               <a:rPr>
                 <a:latin typeface="Courier"/>
               </a:rPr>
-              <a:t>[1] 0.8</a:t>
+              <a:t>[1] 5050</a:t>
             </a:r>
           </a:p>
         </p:txBody>
@@ -6532,6 +6463,31 @@
       </p:grpSpPr>
       <p:sp>
         <p:nvSpPr>
+          <p:cNvPr id="2" name="Title 1"/>
+          <p:cNvSpPr>
+            <a:spLocks noGrp="1"/>
+          </p:cNvSpPr>
+          <p:nvPr>
+            <p:ph type="title"/>
+          </p:nvPr>
+        </p:nvSpPr>
+        <p:spPr/>
+        <p:txBody>
+          <a:bodyPr/>
+          <a:lstStyle/>
+          <a:p>
+            <a:pPr lvl="0" indent="0" marL="0">
+              <a:buNone/>
+            </a:pPr>
+            <a:r>
+              <a:rPr/>
+              <a:t>Variables in R</a:t>
+            </a:r>
+          </a:p>
+        </p:txBody>
+      </p:sp>
+      <p:sp>
+        <p:nvSpPr>
           <p:cNvPr id="3" name="Content Placeholder 2"/>
           <p:cNvSpPr>
             <a:spLocks noGrp="1"/>
@@ -6545,14 +6501,12 @@
           <a:bodyPr/>
           <a:lstStyle/>
           <a:p>
-            <a:pPr lvl="0" indent="0">
+            <a:pPr lvl="0" indent="0" marL="0">
               <a:buNone/>
             </a:pPr>
             <a:r>
-              <a:rPr>
-                <a:latin typeface="Courier"/>
-              </a:rPr>
-              <a:t>[1] 5050</a:t>
+              <a:rPr/>
+              <a:t>We will learn to give a variable (or character) a value.</a:t>
             </a:r>
           </a:p>
         </p:txBody>
@@ -6581,12 +6535,12 @@
       </p:grpSpPr>
       <p:sp>
         <p:nvSpPr>
-          <p:cNvPr id="2" name="Title 1"/>
-          <p:cNvSpPr>
-            <a:spLocks noGrp="1"/>
-          </p:cNvSpPr>
-          <p:nvPr>
-            <p:ph type="title"/>
+          <p:cNvPr id="3" name="Content Placeholder 2"/>
+          <p:cNvSpPr>
+            <a:spLocks noGrp="1"/>
+          </p:cNvSpPr>
+          <p:nvPr>
+            <p:ph idx="1"/>
           </p:nvPr>
         </p:nvSpPr>
         <p:spPr/>
@@ -6599,32 +6553,18 @@
             </a:pPr>
             <a:r>
               <a:rPr/>
-              <a:t>Variables in R</a:t>
-            </a:r>
-          </a:p>
-        </p:txBody>
-      </p:sp>
-      <p:sp>
-        <p:nvSpPr>
-          <p:cNvPr id="3" name="Content Placeholder 2"/>
-          <p:cNvSpPr>
-            <a:spLocks noGrp="1"/>
-          </p:cNvSpPr>
-          <p:nvPr>
-            <p:ph idx="1"/>
-          </p:nvPr>
-        </p:nvSpPr>
-        <p:spPr/>
-        <p:txBody>
-          <a:bodyPr/>
-          <a:lstStyle/>
-          <a:p>
-            <a:pPr lvl="0" indent="0" marL="0">
+              <a:t>Use the different assignment operators</a:t>
+            </a:r>
+          </a:p>
+          <a:p>
+            <a:pPr lvl="0" indent="0">
               <a:buNone/>
             </a:pPr>
             <a:r>
-              <a:rPr/>
-              <a:t>We will learn to give a variable (or character) a value.</a:t>
+              <a:rPr>
+                <a:latin typeface="Courier"/>
+              </a:rPr>
+              <a:t>[1] 2</a:t>
             </a:r>
           </a:p>
         </p:txBody>
@@ -6671,7 +6611,7 @@
             </a:pPr>
             <a:r>
               <a:rPr/>
-              <a:t>Use the different assignment operators</a:t>
+              <a:t>Set x equal to two added to three</a:t>
             </a:r>
           </a:p>
           <a:p>
@@ -6682,7 +6622,7 @@
               <a:rPr>
                 <a:latin typeface="Courier"/>
               </a:rPr>
-              <a:t>[1] 2</a:t>
+              <a:t>[1] 5</a:t>
             </a:r>
           </a:p>
         </p:txBody>
@@ -6729,7 +6669,7 @@
             </a:pPr>
             <a:r>
               <a:rPr/>
-              <a:t>Set x equal to two added to three</a:t>
+              <a:t>Set y equal to two minus three</a:t>
             </a:r>
           </a:p>
           <a:p>
@@ -6740,7 +6680,7 @@
               <a:rPr>
                 <a:latin typeface="Courier"/>
               </a:rPr>
-              <a:t>[1] 5</a:t>
+              <a:t>[1] -1</a:t>
             </a:r>
           </a:p>
         </p:txBody>
@@ -6787,7 +6727,7 @@
             </a:pPr>
             <a:r>
               <a:rPr/>
-              <a:t>Set y equal to two minus three</a:t>
+              <a:t>Set z equal to two times three</a:t>
             </a:r>
           </a:p>
           <a:p>
@@ -6798,7 +6738,7 @@
               <a:rPr>
                 <a:latin typeface="Courier"/>
               </a:rPr>
-              <a:t>[1] -1</a:t>
+              <a:t>[1] 6</a:t>
             </a:r>
           </a:p>
         </p:txBody>
@@ -6845,7 +6785,7 @@
             </a:pPr>
             <a:r>
               <a:rPr/>
-              <a:t>Set z equal to two times three</a:t>
+              <a:t>Overwrite the value of y by setting y equal to x divided by z</a:t>
             </a:r>
           </a:p>
           <a:p>
@@ -6856,7 +6796,7 @@
               <a:rPr>
                 <a:latin typeface="Courier"/>
               </a:rPr>
-              <a:t>[1] 6</a:t>
+              <a:t>[1] 0.8333333</a:t>
             </a:r>
           </a:p>
         </p:txBody>
@@ -6898,23 +6838,21 @@
           <a:bodyPr/>
           <a:lstStyle/>
           <a:p>
-            <a:pPr lvl="0" indent="0" marL="0">
+            <a:pPr lvl="0" indent="0" marL="1270000">
               <a:buNone/>
             </a:pPr>
             <a:r>
-              <a:rPr/>
-              <a:t>Overwrite the value of y by setting y equal to x divided by z</a:t>
-            </a:r>
-          </a:p>
-          <a:p>
-            <a:pPr lvl="0" indent="0">
+              <a:rPr sz="2000" b="1"/>
+              <a:t>Important</a:t>
+            </a:r>
+          </a:p>
+          <a:p>
+            <a:pPr lvl="0" indent="0" marL="1270000">
               <a:buNone/>
             </a:pPr>
             <a:r>
-              <a:rPr>
-                <a:latin typeface="Courier"/>
-              </a:rPr>
-              <a:t>[1] 0.8333333</a:t>
+              <a:rPr sz="2000"/>
+              <a:t>Paper 1 is due on Monday September 16 at 11:59pm ET</a:t>
             </a:r>
           </a:p>
         </p:txBody>
@@ -6956,21 +6894,12 @@
           <a:bodyPr/>
           <a:lstStyle/>
           <a:p>
-            <a:pPr lvl="0" indent="0" marL="1270000">
+            <a:pPr lvl="0" indent="0" marL="0">
               <a:buNone/>
             </a:pPr>
             <a:r>
-              <a:rPr sz="2000" b="1"/>
-              <a:t>Important</a:t>
-            </a:r>
-          </a:p>
-          <a:p>
-            <a:pPr lvl="0" indent="0" marL="1270000">
-              <a:buNone/>
-            </a:pPr>
-            <a:r>
-              <a:rPr sz="2000"/>
-              <a:t>Paper 1 is due on Monday September 16 at 11:59pm ET</a:t>
+              <a:rPr/>
+              <a:t>In the next module, we will continue our explorations in R by learning how to load data sets into our data frame, and perform some basic operations using some additional packages. These packages will allow us to consider how we can construct original data sets to develop unique questions for our analysis.</a:t>
             </a:r>
           </a:p>
         </p:txBody>
@@ -7090,53 +7019,6 @@
 </file>
 
 <file path=ppt/slides/slide40.xml><?xml version="1.0" encoding="utf-8"?>
-<p:sld xmlns:a="http://schemas.openxmlformats.org/drawingml/2006/main" xmlns:r="http://schemas.openxmlformats.org/officeDocument/2006/relationships" xmlns:p="http://schemas.openxmlformats.org/presentationml/2006/main">
-  <p:cSld>
-    <p:spTree>
-      <p:nvGrpSpPr>
-        <p:cNvPr id="1" name=""/>
-        <p:cNvGrpSpPr/>
-        <p:nvPr/>
-      </p:nvGrpSpPr>
-      <p:grpSpPr>
-        <a:xfrm>
-          <a:off x="0" y="0"/>
-          <a:ext cx="0" cy="0"/>
-          <a:chOff x="0" y="0"/>
-          <a:chExt cx="0" cy="0"/>
-        </a:xfrm>
-      </p:grpSpPr>
-      <p:sp>
-        <p:nvSpPr>
-          <p:cNvPr id="3" name="Content Placeholder 2"/>
-          <p:cNvSpPr>
-            <a:spLocks noGrp="1"/>
-          </p:cNvSpPr>
-          <p:nvPr>
-            <p:ph idx="1"/>
-          </p:nvPr>
-        </p:nvSpPr>
-        <p:spPr/>
-        <p:txBody>
-          <a:bodyPr/>
-          <a:lstStyle/>
-          <a:p>
-            <a:pPr lvl="0" indent="0" marL="0">
-              <a:buNone/>
-            </a:pPr>
-            <a:r>
-              <a:rPr/>
-              <a:t>In the next module, we will continue our explorations in R by learning how to load data sets into our data frame, and perform some basic operations using some additional packages. These packages will allow us to consider how we can construct original data sets to develop unique questions for our analysis.</a:t>
-            </a:r>
-          </a:p>
-        </p:txBody>
-      </p:sp>
-    </p:spTree>
-  </p:cSld>
-</p:sld>
-</file>
-
-<file path=ppt/slides/slide41.xml><?xml version="1.0" encoding="utf-8"?>
 <p:sld xmlns:a="http://schemas.openxmlformats.org/drawingml/2006/main" xmlns:r="http://schemas.openxmlformats.org/officeDocument/2006/relationships" xmlns:p="http://schemas.openxmlformats.org/presentationml/2006/main">
   <p:cSld>
     <p:spTree>
@@ -7714,6 +7596,397 @@
                   <a:t>, of a set of values is calculated using:</a:t>
                 </a:r>
               </a:p>
+              <a:p>
+                <a:pPr lvl="0" indent="0" marL="0">
+                  <a:buNone/>
+                </a:pPr>
+                <a14:m>
+                  <m:oMathPara xmlns:m="http://schemas.openxmlformats.org/officeDocument/2006/math">
+                    <m:oMathParaPr>
+                      <m:jc m:val="center"/>
+                    </m:oMathParaPr>
+                    <m:oMath>
+                      <m:r>
+                        <m:t>S</m:t>
+                      </m:r>
+                      <m:r>
+                        <m:rPr>
+                          <m:sty m:val="p"/>
+                        </m:rPr>
+                        <m:t>=</m:t>
+                      </m:r>
+                      <m:rad>
+                        <m:radPr>
+                          <m:degHide m:val="1"/>
+                        </m:radPr>
+                        <m:deg/>
+                        <m:e>
+                          <m:f>
+                            <m:fPr>
+                              <m:type m:val="bar"/>
+                            </m:fPr>
+                            <m:num>
+                              <m:r>
+                                <m:t>Σ</m:t>
+                              </m:r>
+                              <m:sSup>
+                                <m:e>
+                                  <m:d>
+                                    <m:dPr>
+                                      <m:begChr m:val="("/>
+                                      <m:endChr m:val=")"/>
+                                      <m:sepChr m:val=""/>
+                                      <m:grow/>
+                                    </m:dPr>
+                                    <m:e>
+                                      <m:r>
+                                        <m:t>x</m:t>
+                                      </m:r>
+                                      <m:r>
+                                        <m:rPr>
+                                          <m:sty m:val="p"/>
+                                        </m:rPr>
+                                        <m:t>−</m:t>
+                                      </m:r>
+                                      <m:r>
+                                        <m:t>m</m:t>
+                                      </m:r>
+                                    </m:e>
+                                  </m:d>
+                                </m:e>
+                                <m:sup>
+                                  <m:r>
+                                    <m:t>2</m:t>
+                                  </m:r>
+                                </m:sup>
+                              </m:sSup>
+                            </m:num>
+                            <m:den>
+                              <m:r>
+                                <m:t>n</m:t>
+                              </m:r>
+                            </m:den>
+                          </m:f>
+                        </m:e>
+                      </m:rad>
+                    </m:oMath>
+                  </m:oMathPara>
+                </a14:m>
+              </a:p>
+              <a:p>
+                <a:pPr lvl="0" indent="0" marL="0">
+                  <a:spcBef>
+                    <a:spcPts val="3000"/>
+                  </a:spcBef>
+                  <a:buNone/>
+                </a:pPr>
+                <a:r>
+                  <a:rPr b="1"/>
+                  <a:t>EXAMPLE – Standard deviation of a set</a:t>
+                </a:r>
+              </a:p>
+              <a:p>
+                <a:pPr lvl="0" indent="0" marL="0">
+                  <a:buNone/>
+                </a:pPr>
+                <a:r>
+                  <a:rPr/>
+                  <a:t>Assume we have a small set of data: 2, 2, 4, 4. Using the formula for standard deviation above, where </a:t>
+                </a:r>
+                <a14:m>
+                  <m:oMath xmlns:m="http://schemas.openxmlformats.org/officeDocument/2006/math">
+                    <m:r>
+                      <m:t>x</m:t>
+                    </m:r>
+                  </m:oMath>
+                </a14:m>
+                <a:r>
+                  <a:rPr/>
+                  <a:t> is the score, </a:t>
+                </a:r>
+                <a14:m>
+                  <m:oMath xmlns:m="http://schemas.openxmlformats.org/officeDocument/2006/math">
+                    <m:r>
+                      <m:t>m</m:t>
+                    </m:r>
+                  </m:oMath>
+                </a14:m>
+                <a:r>
+                  <a:rPr/>
+                  <a:t> is the mean (sometimes referred to as </a:t>
+                </a:r>
+                <a14:m>
+                  <m:oMath xmlns:m="http://schemas.openxmlformats.org/officeDocument/2006/math">
+                    <m:acc>
+                      <m:accPr>
+                        <m:chr m:val="‾"/>
+                      </m:accPr>
+                      <m:e>
+                        <m:r>
+                          <m:t>x</m:t>
+                        </m:r>
+                      </m:e>
+                    </m:acc>
+                  </m:oMath>
+                </a14:m>
+                <a:r>
+                  <a:rPr/>
+                  <a:t>), and </a:t>
+                </a:r>
+                <a14:m>
+                  <m:oMath xmlns:m="http://schemas.openxmlformats.org/officeDocument/2006/math">
+                    <m:r>
+                      <m:t>n</m:t>
+                    </m:r>
+                  </m:oMath>
+                </a14:m>
+                <a:r>
+                  <a:rPr/>
+                  <a:t> is the sample size, we get the following:</a:t>
+                </a:r>
+              </a:p>
+              <a:p>
+                <a:pPr lvl="0" indent="0" marL="0">
+                  <a:buNone/>
+                </a:pPr>
+                <a14:m>
+                  <m:oMathPara xmlns:m="http://schemas.openxmlformats.org/officeDocument/2006/math">
+                    <m:oMathParaPr>
+                      <m:jc m:val="center"/>
+                    </m:oMathParaPr>
+                    <m:oMath>
+                      <m:f>
+                        <m:fPr>
+                          <m:type m:val="bar"/>
+                        </m:fPr>
+                        <m:num>
+                          <m:sSup>
+                            <m:e>
+                              <m:d>
+                                <m:dPr>
+                                  <m:begChr m:val="("/>
+                                  <m:endChr m:val=")"/>
+                                  <m:sepChr m:val=""/>
+                                  <m:grow/>
+                                </m:dPr>
+                                <m:e>
+                                  <m:r>
+                                    <m:t>2</m:t>
+                                  </m:r>
+                                  <m:r>
+                                    <m:rPr>
+                                      <m:sty m:val="p"/>
+                                    </m:rPr>
+                                    <m:t>−</m:t>
+                                  </m:r>
+                                  <m:r>
+                                    <m:t>3</m:t>
+                                  </m:r>
+                                </m:e>
+                              </m:d>
+                            </m:e>
+                            <m:sup>
+                              <m:r>
+                                <m:t>2</m:t>
+                              </m:r>
+                            </m:sup>
+                          </m:sSup>
+                          <m:r>
+                            <m:rPr>
+                              <m:sty m:val="p"/>
+                            </m:rPr>
+                            <m:t>+</m:t>
+                          </m:r>
+                          <m:sSup>
+                            <m:e>
+                              <m:d>
+                                <m:dPr>
+                                  <m:begChr m:val="("/>
+                                  <m:endChr m:val=")"/>
+                                  <m:sepChr m:val=""/>
+                                  <m:grow/>
+                                </m:dPr>
+                                <m:e>
+                                  <m:r>
+                                    <m:t>2</m:t>
+                                  </m:r>
+                                  <m:r>
+                                    <m:rPr>
+                                      <m:sty m:val="p"/>
+                                    </m:rPr>
+                                    <m:t>−</m:t>
+                                  </m:r>
+                                  <m:r>
+                                    <m:t>3</m:t>
+                                  </m:r>
+                                </m:e>
+                              </m:d>
+                            </m:e>
+                            <m:sup>
+                              <m:r>
+                                <m:t>2</m:t>
+                              </m:r>
+                            </m:sup>
+                          </m:sSup>
+                          <m:r>
+                            <m:rPr>
+                              <m:sty m:val="p"/>
+                            </m:rPr>
+                            <m:t>+</m:t>
+                          </m:r>
+                          <m:sSup>
+                            <m:e>
+                              <m:d>
+                                <m:dPr>
+                                  <m:begChr m:val="("/>
+                                  <m:endChr m:val=")"/>
+                                  <m:sepChr m:val=""/>
+                                  <m:grow/>
+                                </m:dPr>
+                                <m:e>
+                                  <m:r>
+                                    <m:t>4</m:t>
+                                  </m:r>
+                                  <m:r>
+                                    <m:rPr>
+                                      <m:sty m:val="p"/>
+                                    </m:rPr>
+                                    <m:t>−</m:t>
+                                  </m:r>
+                                  <m:r>
+                                    <m:t>3</m:t>
+                                  </m:r>
+                                </m:e>
+                              </m:d>
+                            </m:e>
+                            <m:sup>
+                              <m:r>
+                                <m:t>2</m:t>
+                              </m:r>
+                            </m:sup>
+                          </m:sSup>
+                          <m:r>
+                            <m:rPr>
+                              <m:sty m:val="p"/>
+                            </m:rPr>
+                            <m:t>+</m:t>
+                          </m:r>
+                          <m:sSup>
+                            <m:e>
+                              <m:d>
+                                <m:dPr>
+                                  <m:begChr m:val="("/>
+                                  <m:endChr m:val=")"/>
+                                  <m:sepChr m:val=""/>
+                                  <m:grow/>
+                                </m:dPr>
+                                <m:e>
+                                  <m:r>
+                                    <m:t>4</m:t>
+                                  </m:r>
+                                  <m:r>
+                                    <m:rPr>
+                                      <m:sty m:val="p"/>
+                                    </m:rPr>
+                                    <m:t>−</m:t>
+                                  </m:r>
+                                  <m:r>
+                                    <m:t>3</m:t>
+                                  </m:r>
+                                </m:e>
+                              </m:d>
+                            </m:e>
+                            <m:sup>
+                              <m:r>
+                                <m:t>2</m:t>
+                              </m:r>
+                            </m:sup>
+                          </m:sSup>
+                        </m:num>
+                        <m:den>
+                          <m:r>
+                            <m:t>4</m:t>
+                          </m:r>
+                        </m:den>
+                      </m:f>
+                      <m:r>
+                        <m:rPr>
+                          <m:sty m:val="p"/>
+                        </m:rPr>
+                        <m:t>=</m:t>
+                      </m:r>
+                      <m:f>
+                        <m:fPr>
+                          <m:type m:val="bar"/>
+                        </m:fPr>
+                        <m:num>
+                          <m:r>
+                            <m:t>1</m:t>
+                          </m:r>
+                          <m:r>
+                            <m:rPr>
+                              <m:sty m:val="p"/>
+                            </m:rPr>
+                            <m:t>+</m:t>
+                          </m:r>
+                          <m:r>
+                            <m:t>1</m:t>
+                          </m:r>
+                          <m:r>
+                            <m:rPr>
+                              <m:sty m:val="p"/>
+                            </m:rPr>
+                            <m:t>+</m:t>
+                          </m:r>
+                          <m:r>
+                            <m:t>1</m:t>
+                          </m:r>
+                          <m:r>
+                            <m:rPr>
+                              <m:sty m:val="p"/>
+                            </m:rPr>
+                            <m:t>+</m:t>
+                          </m:r>
+                          <m:r>
+                            <m:t>1</m:t>
+                          </m:r>
+                        </m:num>
+                        <m:den>
+                          <m:r>
+                            <m:t>4</m:t>
+                          </m:r>
+                        </m:den>
+                      </m:f>
+                      <m:r>
+                        <m:rPr>
+                          <m:sty m:val="p"/>
+                        </m:rPr>
+                        <m:t>=</m:t>
+                      </m:r>
+                      <m:r>
+                        <m:t>1</m:t>
+                      </m:r>
+                    </m:oMath>
+                  </m:oMathPara>
+                </a14:m>
+              </a:p>
+              <a:p>
+                <a:pPr lvl="0" indent="0" marL="0">
+                  <a:buNone/>
+                </a:pPr>
+                <a:r>
+                  <a:rPr/>
+                  <a:t>Most formulas of this nature are programmed into </a:t>
+                </a:r>
+                <a:r>
+                  <a:rPr i="1"/>
+                  <a:t>R/RStudio</a:t>
+                </a:r>
+                <a:r>
+                  <a:rPr/>
+                  <a:t>, but for more advanced modeling, we learn how to input raw data and formula into the software.</a:t>
+                </a:r>
+              </a:p>
             </p:txBody>
           </p:sp>
         </mc:Choice>
@@ -7723,7 +7996,79 @@
 </p:sld>
 </file>
 
-<file path=ppt/slides/slide7.xml><?xml version="1.0" encoding="UTF-8"?><p:sld xmlns:a="http://schemas.openxmlformats.org/drawingml/2006/main" xmlns:r="http://schemas.openxmlformats.org/officeDocument/2006/relationships" xmlns:p="http://schemas.openxmlformats.org/presentationml/2006/main"><p:cSld><p:spTree><p:nvGrpSpPr><p:cNvPr id="1" name="" /><p:cNvGrpSpPr /><p:nvPr /></p:nvGrpSpPr><p:grpSpPr><a:xfrm><a:off x="0" y="0" /><a:ext cx="0" cy="0" /><a:chOff x="0" y="0" /><a:chExt cx="0" cy="0" /></a:xfrm></p:grpSpPr><p:sp><p:nvSpPr><p:cNvPr id="2" name="Title 1" /><p:cNvSpPr><a:spLocks noGrp="1" /></p:cNvSpPr><p:nvPr><p:ph type="title" /></p:nvPr></p:nvSpPr><p:spPr /><p:txBody><a:bodyPr /><a:lstStyle /><a:p><a:pPr lvl="0" indent="0" marL="0"><a:buNone /></a:pPr><a14:m><m:oMathPara xmlns:m="http://schemas.openxmlformats.org/officeDocument/2006/math"><m:oMathParaPr><m:jc m:val="center" /></m:oMathParaPr><m:oMath><m:r><m:t>S</m:t></m:r><m:r><m:rPr><m:sty m:val="p" /></m:rPr><m:t>=</m:t></m:r><m:rad><m:radPr><m:degHide m:val="1" /></m:radPr><m:deg /><m:e><m:f><m:fPr><m:type m:val="bar" /></m:fPr><m:num><m:r><m:t>Σ</m:t></m:r><m:sSup><m:e><m:d><m:dPr><m:begChr m:val="(" /><m:endChr m:val=")" /><m:sepChr m:val="" /><m:grow /></m:dPr><m:e><m:r><m:t>x</m:t></m:r><m:r><m:rPr><m:sty m:val="p" /></m:rPr><m:t>−</m:t></m:r><m:r><m:t>m</m:t></m:r></m:e></m:d></m:e><m:sup><m:r><m:t>2</m:t></m:r></m:sup></m:sSup></m:num><m:den><m:r><m:t>n</m:t></m:r></m:den></m:f></m:e></m:rad></m:oMath></m:oMathPara></a14:m></a:p></p:txBody></p:sp><mc:AlternateContent xmlns:mc="http://schemas.openxmlformats.org/markup-compatibility/2006"><mc:Choice xmlns:a14="http://schemas.microsoft.com/office/drawing/2010/main" Requires="a14"><p:sp><p:nvSpPr><p:cNvPr id="3" name="Content Placeholder 2" /><p:cNvSpPr><a:spLocks noGrp="1" /></p:cNvSpPr><p:nvPr><p:ph idx="1" /></p:nvPr></p:nvSpPr><p:spPr /><p:txBody><a:bodyPr /><a:lstStyle /><a:p><a:pPr lvl="0" indent="0" marL="0"><a:spcBef><a:spcPts val="3000" /></a:spcBef><a:buNone /></a:pPr><a:r><a:rPr b="1" /><a:t>EXAMPLE – Standard deviation of a set</a:t></a:r></a:p><a:p><a:pPr lvl="0" indent="0" marL="0"><a:buNone /></a:pPr><a:r><a:rPr /><a:t>Assume we have a small set of data: 2, 2, 4, 4. Using the formula for standard deviation above, where </a:t></a:r><a14:m><m:oMath xmlns:m="http://schemas.openxmlformats.org/officeDocument/2006/math"><m:r><m:t>x</m:t></m:r></m:oMath></a14:m><a:r><a:rPr /><a:t> is the score, </a:t></a:r><a14:m><m:oMath xmlns:m="http://schemas.openxmlformats.org/officeDocument/2006/math"><m:r><m:t>m</m:t></m:r></m:oMath></a14:m><a:r><a:rPr /><a:t> is the mean (sometimes referred to as </a:t></a:r><a14:m><m:oMath xmlns:m="http://schemas.openxmlformats.org/officeDocument/2006/math"><m:acc><m:accPr><m:chr m:val="‾" /></m:accPr><m:e><m:r><m:t>x</m:t></m:r></m:e></m:acc></m:oMath></a14:m><a:r><a:rPr /><a:t>), and </a:t></a:r><a14:m><m:oMath xmlns:m="http://schemas.openxmlformats.org/officeDocument/2006/math"><m:r><m:t>n</m:t></m:r></m:oMath></a14:m><a:r><a:rPr /><a:t> is the sample size, we get the following:</a:t></a:r></a:p><a:p><a:pPr lvl="0" indent="0" marL="0"><a:buNone /></a:pPr><a14:m><m:oMathPara xmlns:m="http://schemas.openxmlformats.org/officeDocument/2006/math"><m:oMathParaPr><m:jc m:val="center" /></m:oMathParaPr><m:oMath><m:f><m:fPr><m:type m:val="bar" /></m:fPr><m:num><m:sSup><m:e><m:d><m:dPr><m:begChr m:val="(" /><m:endChr m:val=")" /><m:sepChr m:val="" /><m:grow /></m:dPr><m:e><m:r><m:t>2</m:t></m:r><m:r><m:rPr><m:sty m:val="p" /></m:rPr><m:t>−</m:t></m:r><m:r><m:t>3</m:t></m:r></m:e></m:d></m:e><m:sup><m:r><m:t>2</m:t></m:r></m:sup></m:sSup><m:r><m:rPr><m:sty m:val="p" /></m:rPr><m:t>+</m:t></m:r><m:sSup><m:e><m:d><m:dPr><m:begChr m:val="(" /><m:endChr m:val=")" /><m:sepChr m:val="" /><m:grow /></m:dPr><m:e><m:r><m:t>2</m:t></m:r><m:r><m:rPr><m:sty m:val="p" /></m:rPr><m:t>−</m:t></m:r><m:r><m:t>3</m:t></m:r></m:e></m:d></m:e><m:sup><m:r><m:t>2</m:t></m:r></m:sup></m:sSup><m:r><m:rPr><m:sty m:val="p" /></m:rPr><m:t>+</m:t></m:r><m:sSup><m:e><m:d><m:dPr><m:begChr m:val="(" /><m:endChr m:val=")" /><m:sepChr m:val="" /><m:grow /></m:dPr><m:e><m:r><m:t>4</m:t></m:r><m:r><m:rPr><m:sty m:val="p" /></m:rPr><m:t>−</m:t></m:r><m:r><m:t>3</m:t></m:r></m:e></m:d></m:e><m:sup><m:r><m:t>2</m:t></m:r></m:sup></m:sSup><m:r><m:rPr><m:sty m:val="p" /></m:rPr><m:t>+</m:t></m:r><m:sSup><m:e><m:d><m:dPr><m:begChr m:val="(" /><m:endChr m:val=")" /><m:sepChr m:val="" /><m:grow /></m:dPr><m:e><m:r><m:t>4</m:t></m:r><m:r><m:rPr><m:sty m:val="p" /></m:rPr><m:t>−</m:t></m:r><m:r><m:t>3</m:t></m:r></m:e></m:d></m:e><m:sup><m:r><m:t>2</m:t></m:r></m:sup></m:sSup></m:num><m:den><m:r><m:t>4</m:t></m:r></m:den></m:f><m:r><m:rPr><m:sty m:val="p" /></m:rPr><m:t>=</m:t></m:r><m:f><m:fPr><m:type m:val="bar" /></m:fPr><m:num><m:r><m:t>1</m:t></m:r><m:r><m:rPr><m:sty m:val="p" /></m:rPr><m:t>+</m:t></m:r><m:r><m:t>1</m:t></m:r><m:r><m:rPr><m:sty m:val="p" /></m:rPr><m:t>+</m:t></m:r><m:r><m:t>1</m:t></m:r><m:r><m:rPr><m:sty m:val="p" /></m:rPr><m:t>+</m:t></m:r><m:r><m:t>1</m:t></m:r></m:num><m:den><m:r><m:t>4</m:t></m:r></m:den></m:f><m:r><m:rPr><m:sty m:val="p" /></m:rPr><m:t>=</m:t></m:r><m:r><m:t>1</m:t></m:r></m:oMath></m:oMathPara></a14:m></a:p><a:p><a:pPr lvl="0" indent="0" marL="0"><a:buNone /></a:pPr><a:r><a:rPr /><a:t>Most formulas of this nature are programmed into </a:t></a:r><a:r><a:rPr i="1" /><a:t>R/RStudio</a:t></a:r><a:r><a:rPr /><a:t>, but for more advanced modeling, we learn how to input raw data and formula into the software.</a:t></a:r></a:p></p:txBody></p:sp></mc:Choice></mc:AlternateContent></p:spTree></p:cSld></p:sld>
+<file path=ppt/slides/slide7.xml><?xml version="1.0" encoding="utf-8"?>
+<p:sld xmlns:a="http://schemas.openxmlformats.org/drawingml/2006/main" xmlns:r="http://schemas.openxmlformats.org/officeDocument/2006/relationships" xmlns:p="http://schemas.openxmlformats.org/presentationml/2006/main">
+  <p:cSld>
+    <p:spTree>
+      <p:nvGrpSpPr>
+        <p:cNvPr id="1" name=""/>
+        <p:cNvGrpSpPr/>
+        <p:nvPr/>
+      </p:nvGrpSpPr>
+      <p:grpSpPr>
+        <a:xfrm>
+          <a:off x="0" y="0"/>
+          <a:ext cx="0" cy="0"/>
+          <a:chOff x="0" y="0"/>
+          <a:chExt cx="0" cy="0"/>
+        </a:xfrm>
+      </p:grpSpPr>
+      <p:sp>
+        <p:nvSpPr>
+          <p:cNvPr id="3" name="Content Placeholder 2"/>
+          <p:cNvSpPr>
+            <a:spLocks noGrp="1"/>
+          </p:cNvSpPr>
+          <p:nvPr>
+            <p:ph idx="1"/>
+          </p:nvPr>
+        </p:nvSpPr>
+        <p:spPr/>
+        <p:txBody>
+          <a:bodyPr/>
+          <a:lstStyle/>
+          <a:p>
+            <a:pPr lvl="0" indent="0" marL="0">
+              <a:spcBef>
+                <a:spcPts val="3000"/>
+              </a:spcBef>
+              <a:buNone/>
+            </a:pPr>
+            <a:r>
+              <a:rPr b="1"/>
+              <a:t>Inferential measures</a:t>
+            </a:r>
+          </a:p>
+          <a:p>
+            <a:pPr lvl="0" indent="0" marL="0">
+              <a:buNone/>
+            </a:pPr>
+            <a:r>
+              <a:rPr/>
+              <a:t>Pelham notes that “the basic idea behind inferential statistical testing is that decisions about what to conclude from a set of research findings need to be made in a logical, unbiased fashoion” (p. 13). However, with a more critical lens on the development of statistics and some of the assumptions made in the mathematical models, we need to consider more concretely about the role of </a:t>
+            </a:r>
+            <a:r>
+              <a:rPr b="1"/>
+              <a:t>theory</a:t>
+            </a:r>
+            <a:r>
+              <a:rPr/>
+              <a:t> and </a:t>
+            </a:r>
+            <a:r>
+              <a:rPr b="1"/>
+              <a:t>context</a:t>
+            </a:r>
+            <a:r>
+              <a:rPr/>
+              <a:t> in making inferences about data.</a:t>
+            </a:r>
+          </a:p>
+        </p:txBody>
+      </p:sp>
+    </p:spTree>
+  </p:cSld>
+</p:sld>
 </file>
 
 <file path=ppt/slides/slide8.xml><?xml version="1.0" encoding="utf-8"?>
@@ -7745,6 +8090,31 @@
       </p:grpSpPr>
       <p:sp>
         <p:nvSpPr>
+          <p:cNvPr id="2" name="Title 1"/>
+          <p:cNvSpPr>
+            <a:spLocks noGrp="1"/>
+          </p:cNvSpPr>
+          <p:nvPr>
+            <p:ph type="title"/>
+          </p:nvPr>
+        </p:nvSpPr>
+        <p:spPr/>
+        <p:txBody>
+          <a:bodyPr/>
+          <a:lstStyle/>
+          <a:p>
+            <a:pPr lvl="0" indent="0" marL="0">
+              <a:buNone/>
+            </a:pPr>
+            <a:r>
+              <a:rPr/>
+              <a:t>What should it mean to be critical in the context of statistics?</a:t>
+            </a:r>
+          </a:p>
+        </p:txBody>
+      </p:sp>
+      <p:sp>
+        <p:nvSpPr>
           <p:cNvPr id="3" name="Content Placeholder 2"/>
           <p:cNvSpPr>
             <a:spLocks noGrp="1"/>
@@ -7766,7 +8136,15 @@
             </a:pPr>
             <a:r>
               <a:rPr b="1"/>
-              <a:t>Inferential measures</a:t>
+              <a:t>Notes from </a:t>
+            </a:r>
+            <a:r>
+              <a:rPr b="1" i="1"/>
+              <a:t>Duncan (n.d.)</a:t>
+            </a:r>
+            <a:r>
+              <a:rPr b="1"/>
+              <a:t> reading.</a:t>
             </a:r>
           </a:p>
           <a:p>
@@ -7775,23 +8153,7 @@
             </a:pPr>
             <a:r>
               <a:rPr/>
-              <a:t>Pelham notes that “the basic idea behind inferential statistical testing is that decisions about what to conclude from a set of research findings need to be made in a logical, unbiased fashoion” (p. 13). However, with a more critical lens on the development of statistics and some of the assumptions made in the mathematical models, we need to consider more concretely about the role of </a:t>
-            </a:r>
-            <a:r>
-              <a:rPr b="1"/>
-              <a:t>theory</a:t>
-            </a:r>
-            <a:r>
-              <a:rPr/>
-              <a:t> and </a:t>
-            </a:r>
-            <a:r>
-              <a:rPr b="1"/>
-              <a:t>context</a:t>
-            </a:r>
-            <a:r>
-              <a:rPr/>
-              <a:t> in making inferences about data.</a:t>
+              <a:t>On Canvas, in the Week 2 folder, there is a document titled “Critical Thinking” by Jennifer Duncan. This document is one example of how we can frame what it could or should mean to be critical in statistics. Please review this document.</a:t>
             </a:r>
           </a:p>
         </p:txBody>
@@ -7820,12 +8182,12 @@
       </p:grpSpPr>
       <p:sp>
         <p:nvSpPr>
-          <p:cNvPr id="2" name="Title 1"/>
-          <p:cNvSpPr>
-            <a:spLocks noGrp="1"/>
-          </p:cNvSpPr>
-          <p:nvPr>
-            <p:ph type="title"/>
+          <p:cNvPr id="3" name="Content Placeholder 2"/>
+          <p:cNvSpPr>
+            <a:spLocks noGrp="1"/>
+          </p:cNvSpPr>
+          <p:nvPr>
+            <p:ph idx="1"/>
           </p:nvPr>
         </p:nvSpPr>
         <p:spPr/>
@@ -7833,57 +8195,43 @@
           <a:bodyPr/>
           <a:lstStyle/>
           <a:p>
-            <a:pPr lvl="0" indent="0" marL="0">
-              <a:buNone/>
-            </a:pPr>
+            <a:pPr lvl="0"/>
+            <a:r>
+              <a:rPr b="1"/>
+              <a:t>Using a higher order of thinking</a:t>
+            </a:r>
             <a:r>
               <a:rPr/>
-              <a:t>What should it mean to be critical in the context of statistics?</a:t>
-            </a:r>
-          </a:p>
-        </p:txBody>
-      </p:sp>
-      <p:sp>
-        <p:nvSpPr>
-          <p:cNvPr id="3" name="Content Placeholder 2"/>
-          <p:cNvSpPr>
-            <a:spLocks noGrp="1"/>
-          </p:cNvSpPr>
-          <p:nvPr>
-            <p:ph idx="1"/>
-          </p:nvPr>
-        </p:nvSpPr>
-        <p:spPr/>
-        <p:txBody>
-          <a:bodyPr/>
-          <a:lstStyle/>
-          <a:p>
-            <a:pPr lvl="0" indent="0" marL="0">
-              <a:spcBef>
-                <a:spcPts val="3000"/>
-              </a:spcBef>
-              <a:buNone/>
-            </a:pPr>
-            <a:r>
-              <a:rPr b="1"/>
-              <a:t>Notes from </a:t>
-            </a:r>
-            <a:r>
-              <a:rPr b="1" i="1"/>
-              <a:t>Duncan (n.d.)</a:t>
-            </a:r>
-            <a:r>
-              <a:rPr b="1"/>
-              <a:t> reading.</a:t>
-            </a:r>
-          </a:p>
-          <a:p>
-            <a:pPr lvl="0" indent="0" marL="0">
-              <a:buNone/>
-            </a:pPr>
+              <a:t>. Duncan emphasizes that </a:t>
+            </a:r>
+            <a:r>
+              <a:rPr i="1"/>
+              <a:t>critical thinking is a higher order of thinking</a:t>
+            </a:r>
             <a:r>
               <a:rPr/>
-              <a:t>On Canvas, in the Week 2 folder, there is a document titled “Critical Thinking” by Jennifer Duncan. This document is one example of how we can frame what it could or should mean to be critical in statistics. Please review this document.</a:t>
+              <a:t> with different advanced thinking skills, and offers a few suggestions.</a:t>
+            </a:r>
+          </a:p>
+          <a:p>
+            <a:pPr lvl="1"/>
+            <a:r>
+              <a:rPr/>
+              <a:t>We base our thinking on logic and not on feelings.</a:t>
+            </a:r>
+          </a:p>
+          <a:p>
+            <a:pPr lvl="1"/>
+            <a:r>
+              <a:rPr/>
+              <a:t>We should look deeper into inferences for hidden assumptions or values.</a:t>
+            </a:r>
+          </a:p>
+          <a:p>
+            <a:pPr lvl="1"/>
+            <a:r>
+              <a:rPr/>
+              <a:t>Ask complex questions that help build a critical inquiry.</a:t>
             </a:r>
           </a:p>
         </p:txBody>

--- a/docs/weeks/week02.pptx
+++ b/docs/weeks/week02.pptx
@@ -8068,6 +8068,27 @@
                 <a:latin typeface="Courier"/>
               </a:rPr>
               <a:t>4</a:t>
+            </a:r>
+            <a:br/>
+            <a:r>
+              <a:rPr>
+                <a:solidFill>
+                  <a:srgbClr val="003B4F"/>
+                </a:solidFill>
+                <a:latin typeface="Courier"/>
+              </a:rPr>
+              <a:t>m</a:t>
+            </a:r>
+          </a:p>
+          <a:p>
+            <a:pPr lvl="0" indent="0">
+              <a:buNone/>
+            </a:pPr>
+            <a:r>
+              <a:rPr>
+                <a:latin typeface="Courier"/>
+              </a:rPr>
+              <a:t>[1] 3</a:t>
             </a:r>
           </a:p>
         </p:txBody>
